--- a/labs_forum/overview_v3.pptx
+++ b/labs_forum/overview_v3.pptx
@@ -3108,8 +3108,8 @@
         </p:blipFill>
         <p:spPr>
           <a:xfrm>
-            <a:off x="792000" y="198000"/>
-            <a:ext cx="1224000" cy="658800"/>
+            <a:off x="684000" y="270000"/>
+            <a:ext cx="1332000" cy="716400"/>
           </a:xfrm>
           <a:prstGeom prst="rect">
             <a:avLst/>
@@ -3132,8 +3132,8 @@
         </p:blipFill>
         <p:spPr>
           <a:xfrm>
-            <a:off x="792000" y="990000"/>
-            <a:ext cx="1224000" cy="658800"/>
+            <a:off x="684000" y="1242000"/>
+            <a:ext cx="1332000" cy="716400"/>
           </a:xfrm>
           <a:prstGeom prst="rect">
             <a:avLst/>
@@ -3148,8 +3148,8 @@
         </p:nvSpPr>
         <p:spPr>
           <a:xfrm>
-            <a:off x="72000" y="419400"/>
-            <a:ext cx="648000" cy="216000"/>
+            <a:off x="17999" y="520200"/>
+            <a:ext cx="612000" cy="216000"/>
           </a:xfrm>
           <a:prstGeom prst="rect">
             <a:avLst/>
@@ -3183,8 +3183,8 @@
         </p:nvSpPr>
         <p:spPr>
           <a:xfrm>
-            <a:off x="72000" y="1211400"/>
-            <a:ext cx="648000" cy="216000"/>
+            <a:off x="17999" y="1492200"/>
+            <a:ext cx="612000" cy="216000"/>
           </a:xfrm>
           <a:prstGeom prst="rect">
             <a:avLst/>
@@ -3218,7 +3218,7 @@
         </p:nvCxnSpPr>
         <p:spPr>
           <a:xfrm>
-            <a:off x="2015999" y="527400"/>
+            <a:off x="2015999" y="628200"/>
             <a:ext cx="216000" cy="0"/>
           </a:xfrm>
           <a:prstGeom prst="line">
@@ -3253,7 +3253,7 @@
         </p:nvCxnSpPr>
         <p:spPr>
           <a:xfrm>
-            <a:off x="2015999" y="1319400"/>
+            <a:off x="2015999" y="1600200"/>
             <a:ext cx="216000" cy="0"/>
           </a:xfrm>
           <a:prstGeom prst="line">
@@ -3288,8 +3288,8 @@
         </p:nvCxnSpPr>
         <p:spPr>
           <a:xfrm>
-            <a:off x="2231999" y="527400"/>
-            <a:ext cx="0" cy="792000"/>
+            <a:off x="2231999" y="628200"/>
+            <a:ext cx="0" cy="972000"/>
           </a:xfrm>
           <a:prstGeom prst="line">
             <a:avLst/>
@@ -3323,8 +3323,8 @@
         </p:nvCxnSpPr>
         <p:spPr>
           <a:xfrm>
-            <a:off x="2231999" y="923400"/>
-            <a:ext cx="288001" cy="0"/>
+            <a:off x="2231999" y="1114200"/>
+            <a:ext cx="144001" cy="0"/>
           </a:xfrm>
           <a:prstGeom prst="line">
             <a:avLst/>
@@ -3359,8 +3359,8 @@
         </p:nvSpPr>
         <p:spPr>
           <a:xfrm>
-            <a:off x="2520000" y="563400"/>
-            <a:ext cx="1080000" cy="720000"/>
+            <a:off x="2376000" y="700200"/>
+            <a:ext cx="1080000" cy="827999"/>
           </a:xfrm>
           <a:prstGeom prst="roundRect">
             <a:avLst>
@@ -3416,7 +3416,7 @@
         </p:nvSpPr>
         <p:spPr>
           <a:xfrm>
-            <a:off x="2340000" y="1326600"/>
+            <a:off x="2196000" y="1571400"/>
             <a:ext cx="1440000" cy="198000"/>
           </a:xfrm>
           <a:prstGeom prst="rect">
@@ -3451,8 +3451,8 @@
         </p:nvCxnSpPr>
         <p:spPr>
           <a:xfrm>
-            <a:off x="3600000" y="923400"/>
-            <a:ext cx="97200" cy="0"/>
+            <a:off x="3456000" y="1114200"/>
+            <a:ext cx="205200" cy="0"/>
           </a:xfrm>
           <a:prstGeom prst="line">
             <a:avLst/>
@@ -3487,8 +3487,8 @@
         </p:nvSpPr>
         <p:spPr>
           <a:xfrm>
-            <a:off x="3707999" y="125999"/>
-            <a:ext cx="192000" cy="189000"/>
+            <a:off x="3671999" y="162000"/>
+            <a:ext cx="200000" cy="225000"/>
           </a:xfrm>
           <a:prstGeom prst="rect">
             <a:avLst/>
@@ -3533,8 +3533,8 @@
         </p:nvSpPr>
         <p:spPr>
           <a:xfrm>
-            <a:off x="3899999" y="125999"/>
-            <a:ext cx="192000" cy="189000"/>
+            <a:off x="3871999" y="162000"/>
+            <a:ext cx="200000" cy="225000"/>
           </a:xfrm>
           <a:prstGeom prst="rect">
             <a:avLst/>
@@ -3579,8 +3579,8 @@
         </p:nvSpPr>
         <p:spPr>
           <a:xfrm>
-            <a:off x="4091999" y="125999"/>
-            <a:ext cx="192000" cy="189000"/>
+            <a:off x="4071999" y="162000"/>
+            <a:ext cx="200000" cy="225000"/>
           </a:xfrm>
           <a:prstGeom prst="rect">
             <a:avLst/>
@@ -3625,8 +3625,8 @@
         </p:nvSpPr>
         <p:spPr>
           <a:xfrm>
-            <a:off x="4283999" y="125999"/>
-            <a:ext cx="192000" cy="189000"/>
+            <a:off x="4271999" y="162000"/>
+            <a:ext cx="200000" cy="225000"/>
           </a:xfrm>
           <a:prstGeom prst="rect">
             <a:avLst/>
@@ -3671,8 +3671,8 @@
         </p:nvSpPr>
         <p:spPr>
           <a:xfrm>
-            <a:off x="4475999" y="125999"/>
-            <a:ext cx="192000" cy="189000"/>
+            <a:off x="4471999" y="162000"/>
+            <a:ext cx="200000" cy="225000"/>
           </a:xfrm>
           <a:prstGeom prst="rect">
             <a:avLst/>
@@ -3717,8 +3717,8 @@
         </p:nvSpPr>
         <p:spPr>
           <a:xfrm>
-            <a:off x="4667999" y="125999"/>
-            <a:ext cx="192000" cy="189000"/>
+            <a:off x="4672000" y="162000"/>
+            <a:ext cx="200000" cy="225000"/>
           </a:xfrm>
           <a:prstGeom prst="rect">
             <a:avLst/>
@@ -3763,8 +3763,8 @@
         </p:nvSpPr>
         <p:spPr>
           <a:xfrm>
-            <a:off x="4860000" y="125999"/>
-            <a:ext cx="192000" cy="189000"/>
+            <a:off x="4872000" y="162000"/>
+            <a:ext cx="200000" cy="225000"/>
           </a:xfrm>
           <a:prstGeom prst="rect">
             <a:avLst/>
@@ -3809,8 +3809,8 @@
         </p:nvSpPr>
         <p:spPr>
           <a:xfrm>
-            <a:off x="5051999" y="125999"/>
-            <a:ext cx="192000" cy="189000"/>
+            <a:off x="5072000" y="162000"/>
+            <a:ext cx="200000" cy="225000"/>
           </a:xfrm>
           <a:prstGeom prst="rect">
             <a:avLst/>
@@ -3855,8 +3855,8 @@
         </p:nvSpPr>
         <p:spPr>
           <a:xfrm>
-            <a:off x="5244000" y="125999"/>
-            <a:ext cx="192000" cy="189000"/>
+            <a:off x="5272000" y="162000"/>
+            <a:ext cx="200000" cy="225000"/>
           </a:xfrm>
           <a:prstGeom prst="rect">
             <a:avLst/>
@@ -3901,8 +3901,8 @@
         </p:nvSpPr>
         <p:spPr>
           <a:xfrm>
-            <a:off x="3707999" y="315000"/>
-            <a:ext cx="192000" cy="189000"/>
+            <a:off x="3671999" y="387000"/>
+            <a:ext cx="200000" cy="225000"/>
           </a:xfrm>
           <a:prstGeom prst="rect">
             <a:avLst/>
@@ -3947,8 +3947,8 @@
         </p:nvSpPr>
         <p:spPr>
           <a:xfrm>
-            <a:off x="3899999" y="315000"/>
-            <a:ext cx="192000" cy="189000"/>
+            <a:off x="3871999" y="387000"/>
+            <a:ext cx="200000" cy="225000"/>
           </a:xfrm>
           <a:prstGeom prst="rect">
             <a:avLst/>
@@ -3993,8 +3993,8 @@
         </p:nvSpPr>
         <p:spPr>
           <a:xfrm>
-            <a:off x="4091999" y="315000"/>
-            <a:ext cx="192000" cy="189000"/>
+            <a:off x="4071999" y="387000"/>
+            <a:ext cx="200000" cy="225000"/>
           </a:xfrm>
           <a:prstGeom prst="rect">
             <a:avLst/>
@@ -4039,8 +4039,8 @@
         </p:nvSpPr>
         <p:spPr>
           <a:xfrm>
-            <a:off x="4283999" y="315000"/>
-            <a:ext cx="192000" cy="189000"/>
+            <a:off x="4271999" y="387000"/>
+            <a:ext cx="200000" cy="225000"/>
           </a:xfrm>
           <a:prstGeom prst="rect">
             <a:avLst/>
@@ -4085,8 +4085,8 @@
         </p:nvSpPr>
         <p:spPr>
           <a:xfrm>
-            <a:off x="4475999" y="315000"/>
-            <a:ext cx="192000" cy="189000"/>
+            <a:off x="4471999" y="387000"/>
+            <a:ext cx="200000" cy="225000"/>
           </a:xfrm>
           <a:prstGeom prst="rect">
             <a:avLst/>
@@ -4131,8 +4131,8 @@
         </p:nvSpPr>
         <p:spPr>
           <a:xfrm>
-            <a:off x="4667999" y="315000"/>
-            <a:ext cx="192000" cy="189000"/>
+            <a:off x="4672000" y="387000"/>
+            <a:ext cx="200000" cy="225000"/>
           </a:xfrm>
           <a:prstGeom prst="rect">
             <a:avLst/>
@@ -4177,8 +4177,8 @@
         </p:nvSpPr>
         <p:spPr>
           <a:xfrm>
-            <a:off x="4860000" y="315000"/>
-            <a:ext cx="192000" cy="189000"/>
+            <a:off x="4872000" y="387000"/>
+            <a:ext cx="200000" cy="225000"/>
           </a:xfrm>
           <a:prstGeom prst="rect">
             <a:avLst/>
@@ -4223,8 +4223,8 @@
         </p:nvSpPr>
         <p:spPr>
           <a:xfrm>
-            <a:off x="5051999" y="315000"/>
-            <a:ext cx="192000" cy="189000"/>
+            <a:off x="5072000" y="387000"/>
+            <a:ext cx="200000" cy="225000"/>
           </a:xfrm>
           <a:prstGeom prst="rect">
             <a:avLst/>
@@ -4269,8 +4269,8 @@
         </p:nvSpPr>
         <p:spPr>
           <a:xfrm>
-            <a:off x="5244000" y="315000"/>
-            <a:ext cx="192000" cy="189000"/>
+            <a:off x="5272000" y="387000"/>
+            <a:ext cx="200000" cy="225000"/>
           </a:xfrm>
           <a:prstGeom prst="rect">
             <a:avLst/>
@@ -4315,8 +4315,8 @@
         </p:nvSpPr>
         <p:spPr>
           <a:xfrm>
-            <a:off x="3707999" y="503999"/>
-            <a:ext cx="192000" cy="189000"/>
+            <a:off x="3671999" y="612000"/>
+            <a:ext cx="200000" cy="225000"/>
           </a:xfrm>
           <a:prstGeom prst="rect">
             <a:avLst/>
@@ -4361,8 +4361,8 @@
         </p:nvSpPr>
         <p:spPr>
           <a:xfrm>
-            <a:off x="3899999" y="503999"/>
-            <a:ext cx="192000" cy="189000"/>
+            <a:off x="3871999" y="612000"/>
+            <a:ext cx="200000" cy="225000"/>
           </a:xfrm>
           <a:prstGeom prst="rect">
             <a:avLst/>
@@ -4407,8 +4407,8 @@
         </p:nvSpPr>
         <p:spPr>
           <a:xfrm>
-            <a:off x="4091999" y="503999"/>
-            <a:ext cx="192000" cy="189000"/>
+            <a:off x="4071999" y="612000"/>
+            <a:ext cx="200000" cy="225000"/>
           </a:xfrm>
           <a:prstGeom prst="rect">
             <a:avLst/>
@@ -4453,8 +4453,8 @@
         </p:nvSpPr>
         <p:spPr>
           <a:xfrm>
-            <a:off x="4283999" y="503999"/>
-            <a:ext cx="192000" cy="189000"/>
+            <a:off x="4271999" y="612000"/>
+            <a:ext cx="200000" cy="225000"/>
           </a:xfrm>
           <a:prstGeom prst="rect">
             <a:avLst/>
@@ -4499,8 +4499,8 @@
         </p:nvSpPr>
         <p:spPr>
           <a:xfrm>
-            <a:off x="4475999" y="503999"/>
-            <a:ext cx="192000" cy="189000"/>
+            <a:off x="4471999" y="612000"/>
+            <a:ext cx="200000" cy="225000"/>
           </a:xfrm>
           <a:prstGeom prst="rect">
             <a:avLst/>
@@ -4545,8 +4545,8 @@
         </p:nvSpPr>
         <p:spPr>
           <a:xfrm>
-            <a:off x="4667999" y="503999"/>
-            <a:ext cx="192000" cy="189000"/>
+            <a:off x="4672000" y="612000"/>
+            <a:ext cx="200000" cy="225000"/>
           </a:xfrm>
           <a:prstGeom prst="rect">
             <a:avLst/>
@@ -4591,8 +4591,8 @@
         </p:nvSpPr>
         <p:spPr>
           <a:xfrm>
-            <a:off x="4860000" y="503999"/>
-            <a:ext cx="192000" cy="189000"/>
+            <a:off x="4872000" y="612000"/>
+            <a:ext cx="200000" cy="225000"/>
           </a:xfrm>
           <a:prstGeom prst="rect">
             <a:avLst/>
@@ -4637,8 +4637,8 @@
         </p:nvSpPr>
         <p:spPr>
           <a:xfrm>
-            <a:off x="5051999" y="503999"/>
-            <a:ext cx="192000" cy="189000"/>
+            <a:off x="5072000" y="612000"/>
+            <a:ext cx="200000" cy="225000"/>
           </a:xfrm>
           <a:prstGeom prst="rect">
             <a:avLst/>
@@ -4683,8 +4683,8 @@
         </p:nvSpPr>
         <p:spPr>
           <a:xfrm>
-            <a:off x="5244000" y="503999"/>
-            <a:ext cx="192000" cy="189000"/>
+            <a:off x="5272000" y="612000"/>
+            <a:ext cx="200000" cy="225000"/>
           </a:xfrm>
           <a:prstGeom prst="rect">
             <a:avLst/>
@@ -4729,8 +4729,8 @@
         </p:nvSpPr>
         <p:spPr>
           <a:xfrm>
-            <a:off x="3707999" y="693000"/>
-            <a:ext cx="192000" cy="189000"/>
+            <a:off x="3671999" y="837000"/>
+            <a:ext cx="200000" cy="225000"/>
           </a:xfrm>
           <a:prstGeom prst="rect">
             <a:avLst/>
@@ -4775,8 +4775,8 @@
         </p:nvSpPr>
         <p:spPr>
           <a:xfrm>
-            <a:off x="3899999" y="693000"/>
-            <a:ext cx="192000" cy="189000"/>
+            <a:off x="3871999" y="837000"/>
+            <a:ext cx="200000" cy="225000"/>
           </a:xfrm>
           <a:prstGeom prst="rect">
             <a:avLst/>
@@ -4821,8 +4821,8 @@
         </p:nvSpPr>
         <p:spPr>
           <a:xfrm>
-            <a:off x="4091999" y="693000"/>
-            <a:ext cx="192000" cy="189000"/>
+            <a:off x="4071999" y="837000"/>
+            <a:ext cx="200000" cy="225000"/>
           </a:xfrm>
           <a:prstGeom prst="rect">
             <a:avLst/>
@@ -4867,8 +4867,8 @@
         </p:nvSpPr>
         <p:spPr>
           <a:xfrm>
-            <a:off x="4283999" y="693000"/>
-            <a:ext cx="192000" cy="189000"/>
+            <a:off x="4271999" y="837000"/>
+            <a:ext cx="200000" cy="225000"/>
           </a:xfrm>
           <a:prstGeom prst="rect">
             <a:avLst/>
@@ -4913,8 +4913,8 @@
         </p:nvSpPr>
         <p:spPr>
           <a:xfrm>
-            <a:off x="4475999" y="693000"/>
-            <a:ext cx="192000" cy="189000"/>
+            <a:off x="4471999" y="837000"/>
+            <a:ext cx="200000" cy="225000"/>
           </a:xfrm>
           <a:prstGeom prst="rect">
             <a:avLst/>
@@ -4959,8 +4959,8 @@
         </p:nvSpPr>
         <p:spPr>
           <a:xfrm>
-            <a:off x="4667999" y="693000"/>
-            <a:ext cx="192000" cy="189000"/>
+            <a:off x="4672000" y="837000"/>
+            <a:ext cx="200000" cy="225000"/>
           </a:xfrm>
           <a:prstGeom prst="rect">
             <a:avLst/>
@@ -5005,8 +5005,8 @@
         </p:nvSpPr>
         <p:spPr>
           <a:xfrm>
-            <a:off x="4860000" y="693000"/>
-            <a:ext cx="192000" cy="189000"/>
+            <a:off x="4872000" y="837000"/>
+            <a:ext cx="200000" cy="225000"/>
           </a:xfrm>
           <a:prstGeom prst="rect">
             <a:avLst/>
@@ -5051,8 +5051,8 @@
         </p:nvSpPr>
         <p:spPr>
           <a:xfrm>
-            <a:off x="5051999" y="693000"/>
-            <a:ext cx="192000" cy="189000"/>
+            <a:off x="5072000" y="837000"/>
+            <a:ext cx="200000" cy="225000"/>
           </a:xfrm>
           <a:prstGeom prst="rect">
             <a:avLst/>
@@ -5097,8 +5097,8 @@
         </p:nvSpPr>
         <p:spPr>
           <a:xfrm>
-            <a:off x="5244000" y="693000"/>
-            <a:ext cx="192000" cy="189000"/>
+            <a:off x="5272000" y="837000"/>
+            <a:ext cx="200000" cy="225000"/>
           </a:xfrm>
           <a:prstGeom prst="rect">
             <a:avLst/>
@@ -5143,8 +5143,8 @@
         </p:nvSpPr>
         <p:spPr>
           <a:xfrm>
-            <a:off x="3707999" y="882000"/>
-            <a:ext cx="192000" cy="189000"/>
+            <a:off x="3671999" y="1062000"/>
+            <a:ext cx="200000" cy="225000"/>
           </a:xfrm>
           <a:prstGeom prst="rect">
             <a:avLst/>
@@ -5189,8 +5189,8 @@
         </p:nvSpPr>
         <p:spPr>
           <a:xfrm>
-            <a:off x="3899999" y="882000"/>
-            <a:ext cx="192000" cy="189000"/>
+            <a:off x="3871999" y="1062000"/>
+            <a:ext cx="200000" cy="225000"/>
           </a:xfrm>
           <a:prstGeom prst="rect">
             <a:avLst/>
@@ -5235,8 +5235,8 @@
         </p:nvSpPr>
         <p:spPr>
           <a:xfrm>
-            <a:off x="4091999" y="882000"/>
-            <a:ext cx="192000" cy="189000"/>
+            <a:off x="4071999" y="1062000"/>
+            <a:ext cx="200000" cy="225000"/>
           </a:xfrm>
           <a:prstGeom prst="rect">
             <a:avLst/>
@@ -5281,8 +5281,8 @@
         </p:nvSpPr>
         <p:spPr>
           <a:xfrm>
-            <a:off x="4283999" y="882000"/>
-            <a:ext cx="192000" cy="189000"/>
+            <a:off x="4271999" y="1062000"/>
+            <a:ext cx="200000" cy="225000"/>
           </a:xfrm>
           <a:prstGeom prst="rect">
             <a:avLst/>
@@ -5327,8 +5327,8 @@
         </p:nvSpPr>
         <p:spPr>
           <a:xfrm>
-            <a:off x="4475999" y="882000"/>
-            <a:ext cx="192000" cy="189000"/>
+            <a:off x="4471999" y="1062000"/>
+            <a:ext cx="200000" cy="225000"/>
           </a:xfrm>
           <a:prstGeom prst="rect">
             <a:avLst/>
@@ -5373,8 +5373,8 @@
         </p:nvSpPr>
         <p:spPr>
           <a:xfrm>
-            <a:off x="4667999" y="882000"/>
-            <a:ext cx="192000" cy="189000"/>
+            <a:off x="4672000" y="1062000"/>
+            <a:ext cx="200000" cy="225000"/>
           </a:xfrm>
           <a:prstGeom prst="rect">
             <a:avLst/>
@@ -5419,8 +5419,8 @@
         </p:nvSpPr>
         <p:spPr>
           <a:xfrm>
-            <a:off x="4860000" y="882000"/>
-            <a:ext cx="192000" cy="189000"/>
+            <a:off x="4872000" y="1062000"/>
+            <a:ext cx="200000" cy="225000"/>
           </a:xfrm>
           <a:prstGeom prst="rect">
             <a:avLst/>
@@ -5465,8 +5465,8 @@
         </p:nvSpPr>
         <p:spPr>
           <a:xfrm>
-            <a:off x="5051999" y="882000"/>
-            <a:ext cx="192000" cy="189000"/>
+            <a:off x="5072000" y="1062000"/>
+            <a:ext cx="200000" cy="225000"/>
           </a:xfrm>
           <a:prstGeom prst="rect">
             <a:avLst/>
@@ -5511,8 +5511,8 @@
         </p:nvSpPr>
         <p:spPr>
           <a:xfrm>
-            <a:off x="5244000" y="882000"/>
-            <a:ext cx="192000" cy="189000"/>
+            <a:off x="5272000" y="1062000"/>
+            <a:ext cx="200000" cy="225000"/>
           </a:xfrm>
           <a:prstGeom prst="rect">
             <a:avLst/>
@@ -5557,8 +5557,8 @@
         </p:nvSpPr>
         <p:spPr>
           <a:xfrm>
-            <a:off x="3707999" y="1071000"/>
-            <a:ext cx="192000" cy="189000"/>
+            <a:off x="3671999" y="1287000"/>
+            <a:ext cx="200000" cy="225000"/>
           </a:xfrm>
           <a:prstGeom prst="rect">
             <a:avLst/>
@@ -5603,8 +5603,8 @@
         </p:nvSpPr>
         <p:spPr>
           <a:xfrm>
-            <a:off x="3899999" y="1071000"/>
-            <a:ext cx="192000" cy="189000"/>
+            <a:off x="3871999" y="1287000"/>
+            <a:ext cx="200000" cy="225000"/>
           </a:xfrm>
           <a:prstGeom prst="rect">
             <a:avLst/>
@@ -5649,8 +5649,8 @@
         </p:nvSpPr>
         <p:spPr>
           <a:xfrm>
-            <a:off x="4091999" y="1071000"/>
-            <a:ext cx="192000" cy="189000"/>
+            <a:off x="4071999" y="1287000"/>
+            <a:ext cx="200000" cy="225000"/>
           </a:xfrm>
           <a:prstGeom prst="rect">
             <a:avLst/>
@@ -5695,8 +5695,8 @@
         </p:nvSpPr>
         <p:spPr>
           <a:xfrm>
-            <a:off x="4283999" y="1071000"/>
-            <a:ext cx="192000" cy="189000"/>
+            <a:off x="4271999" y="1287000"/>
+            <a:ext cx="200000" cy="225000"/>
           </a:xfrm>
           <a:prstGeom prst="rect">
             <a:avLst/>
@@ -5741,8 +5741,8 @@
         </p:nvSpPr>
         <p:spPr>
           <a:xfrm>
-            <a:off x="4475999" y="1071000"/>
-            <a:ext cx="192000" cy="189000"/>
+            <a:off x="4471999" y="1287000"/>
+            <a:ext cx="200000" cy="225000"/>
           </a:xfrm>
           <a:prstGeom prst="rect">
             <a:avLst/>
@@ -5787,8 +5787,8 @@
         </p:nvSpPr>
         <p:spPr>
           <a:xfrm>
-            <a:off x="4667999" y="1071000"/>
-            <a:ext cx="192000" cy="189000"/>
+            <a:off x="4672000" y="1287000"/>
+            <a:ext cx="200000" cy="225000"/>
           </a:xfrm>
           <a:prstGeom prst="rect">
             <a:avLst/>
@@ -5833,8 +5833,8 @@
         </p:nvSpPr>
         <p:spPr>
           <a:xfrm>
-            <a:off x="4860000" y="1071000"/>
-            <a:ext cx="192000" cy="189000"/>
+            <a:off x="4872000" y="1287000"/>
+            <a:ext cx="200000" cy="225000"/>
           </a:xfrm>
           <a:prstGeom prst="rect">
             <a:avLst/>
@@ -5879,8 +5879,8 @@
         </p:nvSpPr>
         <p:spPr>
           <a:xfrm>
-            <a:off x="5051999" y="1071000"/>
-            <a:ext cx="192000" cy="189000"/>
+            <a:off x="5072000" y="1287000"/>
+            <a:ext cx="200000" cy="225000"/>
           </a:xfrm>
           <a:prstGeom prst="rect">
             <a:avLst/>
@@ -5925,8 +5925,8 @@
         </p:nvSpPr>
         <p:spPr>
           <a:xfrm>
-            <a:off x="5244000" y="1071000"/>
-            <a:ext cx="192000" cy="189000"/>
+            <a:off x="5272000" y="1287000"/>
+            <a:ext cx="200000" cy="225000"/>
           </a:xfrm>
           <a:prstGeom prst="rect">
             <a:avLst/>
@@ -5971,8 +5971,8 @@
         </p:nvSpPr>
         <p:spPr>
           <a:xfrm>
-            <a:off x="3707999" y="1260000"/>
-            <a:ext cx="192000" cy="189000"/>
+            <a:off x="3671999" y="1512000"/>
+            <a:ext cx="200000" cy="225000"/>
           </a:xfrm>
           <a:prstGeom prst="rect">
             <a:avLst/>
@@ -6017,8 +6017,8 @@
         </p:nvSpPr>
         <p:spPr>
           <a:xfrm>
-            <a:off x="3899999" y="1260000"/>
-            <a:ext cx="192000" cy="189000"/>
+            <a:off x="3871999" y="1512000"/>
+            <a:ext cx="200000" cy="225000"/>
           </a:xfrm>
           <a:prstGeom prst="rect">
             <a:avLst/>
@@ -6063,8 +6063,8 @@
         </p:nvSpPr>
         <p:spPr>
           <a:xfrm>
-            <a:off x="4091999" y="1260000"/>
-            <a:ext cx="192000" cy="189000"/>
+            <a:off x="4071999" y="1512000"/>
+            <a:ext cx="200000" cy="225000"/>
           </a:xfrm>
           <a:prstGeom prst="rect">
             <a:avLst/>
@@ -6109,8 +6109,8 @@
         </p:nvSpPr>
         <p:spPr>
           <a:xfrm>
-            <a:off x="4283999" y="1260000"/>
-            <a:ext cx="192000" cy="189000"/>
+            <a:off x="4271999" y="1512000"/>
+            <a:ext cx="200000" cy="225000"/>
           </a:xfrm>
           <a:prstGeom prst="rect">
             <a:avLst/>
@@ -6155,8 +6155,8 @@
         </p:nvSpPr>
         <p:spPr>
           <a:xfrm>
-            <a:off x="4475999" y="1260000"/>
-            <a:ext cx="192000" cy="189000"/>
+            <a:off x="4471999" y="1512000"/>
+            <a:ext cx="200000" cy="225000"/>
           </a:xfrm>
           <a:prstGeom prst="rect">
             <a:avLst/>
@@ -6201,8 +6201,8 @@
         </p:nvSpPr>
         <p:spPr>
           <a:xfrm>
-            <a:off x="4667999" y="1260000"/>
-            <a:ext cx="192000" cy="189000"/>
+            <a:off x="4672000" y="1512000"/>
+            <a:ext cx="200000" cy="225000"/>
           </a:xfrm>
           <a:prstGeom prst="rect">
             <a:avLst/>
@@ -6247,8 +6247,8 @@
         </p:nvSpPr>
         <p:spPr>
           <a:xfrm>
-            <a:off x="4860000" y="1260000"/>
-            <a:ext cx="192000" cy="189000"/>
+            <a:off x="4872000" y="1512000"/>
+            <a:ext cx="200000" cy="225000"/>
           </a:xfrm>
           <a:prstGeom prst="rect">
             <a:avLst/>
@@ -6293,8 +6293,8 @@
         </p:nvSpPr>
         <p:spPr>
           <a:xfrm>
-            <a:off x="5051999" y="1260000"/>
-            <a:ext cx="192000" cy="189000"/>
+            <a:off x="5072000" y="1512000"/>
+            <a:ext cx="200000" cy="225000"/>
           </a:xfrm>
           <a:prstGeom prst="rect">
             <a:avLst/>
@@ -6339,8 +6339,8 @@
         </p:nvSpPr>
         <p:spPr>
           <a:xfrm>
-            <a:off x="5244000" y="1260000"/>
-            <a:ext cx="192000" cy="189000"/>
+            <a:off x="5272000" y="1512000"/>
+            <a:ext cx="200000" cy="225000"/>
           </a:xfrm>
           <a:prstGeom prst="rect">
             <a:avLst/>
@@ -6385,8 +6385,8 @@
         </p:nvSpPr>
         <p:spPr>
           <a:xfrm>
-            <a:off x="3707999" y="1449000"/>
-            <a:ext cx="192000" cy="189000"/>
+            <a:off x="3671999" y="1737000"/>
+            <a:ext cx="200000" cy="225000"/>
           </a:xfrm>
           <a:prstGeom prst="rect">
             <a:avLst/>
@@ -6431,8 +6431,8 @@
         </p:nvSpPr>
         <p:spPr>
           <a:xfrm>
-            <a:off x="3899999" y="1449000"/>
-            <a:ext cx="192000" cy="189000"/>
+            <a:off x="3871999" y="1737000"/>
+            <a:ext cx="200000" cy="225000"/>
           </a:xfrm>
           <a:prstGeom prst="rect">
             <a:avLst/>
@@ -6477,8 +6477,8 @@
         </p:nvSpPr>
         <p:spPr>
           <a:xfrm>
-            <a:off x="4091999" y="1449000"/>
-            <a:ext cx="192000" cy="189000"/>
+            <a:off x="4071999" y="1737000"/>
+            <a:ext cx="200000" cy="225000"/>
           </a:xfrm>
           <a:prstGeom prst="rect">
             <a:avLst/>
@@ -6523,8 +6523,8 @@
         </p:nvSpPr>
         <p:spPr>
           <a:xfrm>
-            <a:off x="4283999" y="1449000"/>
-            <a:ext cx="192000" cy="189000"/>
+            <a:off x="4271999" y="1737000"/>
+            <a:ext cx="200000" cy="225000"/>
           </a:xfrm>
           <a:prstGeom prst="rect">
             <a:avLst/>
@@ -6569,8 +6569,8 @@
         </p:nvSpPr>
         <p:spPr>
           <a:xfrm>
-            <a:off x="4475999" y="1449000"/>
-            <a:ext cx="192000" cy="189000"/>
+            <a:off x="4471999" y="1737000"/>
+            <a:ext cx="200000" cy="225000"/>
           </a:xfrm>
           <a:prstGeom prst="rect">
             <a:avLst/>
@@ -6615,8 +6615,8 @@
         </p:nvSpPr>
         <p:spPr>
           <a:xfrm>
-            <a:off x="4667999" y="1449000"/>
-            <a:ext cx="192000" cy="189000"/>
+            <a:off x="4672000" y="1737000"/>
+            <a:ext cx="200000" cy="225000"/>
           </a:xfrm>
           <a:prstGeom prst="rect">
             <a:avLst/>
@@ -6661,8 +6661,8 @@
         </p:nvSpPr>
         <p:spPr>
           <a:xfrm>
-            <a:off x="4860000" y="1449000"/>
-            <a:ext cx="192000" cy="189000"/>
+            <a:off x="4872000" y="1737000"/>
+            <a:ext cx="200000" cy="225000"/>
           </a:xfrm>
           <a:prstGeom prst="rect">
             <a:avLst/>
@@ -6707,8 +6707,8 @@
         </p:nvSpPr>
         <p:spPr>
           <a:xfrm>
-            <a:off x="5051999" y="1449000"/>
-            <a:ext cx="192000" cy="189000"/>
+            <a:off x="5072000" y="1737000"/>
+            <a:ext cx="200000" cy="225000"/>
           </a:xfrm>
           <a:prstGeom prst="rect">
             <a:avLst/>
@@ -6753,8 +6753,8 @@
         </p:nvSpPr>
         <p:spPr>
           <a:xfrm>
-            <a:off x="5244000" y="1449000"/>
-            <a:ext cx="192000" cy="189000"/>
+            <a:off x="5272000" y="1737000"/>
+            <a:ext cx="200000" cy="225000"/>
           </a:xfrm>
           <a:prstGeom prst="rect">
             <a:avLst/>
@@ -6799,8 +6799,8 @@
         </p:nvSpPr>
         <p:spPr>
           <a:xfrm>
-            <a:off x="5561999" y="797400"/>
-            <a:ext cx="1440000" cy="251999"/>
+            <a:off x="5598000" y="936000"/>
+            <a:ext cx="1800000" cy="251999"/>
           </a:xfrm>
           <a:prstGeom prst="rect">
             <a:avLst/>
@@ -6834,8 +6834,8 @@
         </p:nvCxnSpPr>
         <p:spPr>
           <a:xfrm>
-            <a:off x="4572000" y="1638000"/>
-            <a:ext cx="0" cy="270000"/>
+            <a:off x="4572000" y="1962000"/>
+            <a:ext cx="0" cy="306000"/>
           </a:xfrm>
           <a:prstGeom prst="line">
             <a:avLst/>
@@ -6869,7 +6869,7 @@
         </p:nvCxnSpPr>
         <p:spPr>
           <a:xfrm>
-            <a:off x="1350000" y="1908000"/>
+            <a:off x="1350000" y="2268000"/>
             <a:ext cx="6425999" cy="0"/>
           </a:xfrm>
           <a:prstGeom prst="line">
@@ -6904,7 +6904,7 @@
         </p:nvCxnSpPr>
         <p:spPr>
           <a:xfrm>
-            <a:off x="1350000" y="1908000"/>
+            <a:off x="1350000" y="2268000"/>
             <a:ext cx="0" cy="154800"/>
           </a:xfrm>
           <a:prstGeom prst="line">
@@ -6940,8 +6940,8 @@
         </p:nvSpPr>
         <p:spPr>
           <a:xfrm>
-            <a:off x="342000" y="2070000"/>
-            <a:ext cx="2015999" cy="2951999"/>
+            <a:off x="342000" y="2430000"/>
+            <a:ext cx="2015999" cy="2591999"/>
           </a:xfrm>
           <a:prstGeom prst="roundRect">
             <a:avLst>
@@ -6988,7 +6988,7 @@
         </p:nvSpPr>
         <p:spPr>
           <a:xfrm>
-            <a:off x="450000" y="2124000"/>
+            <a:off x="450000" y="2484000"/>
             <a:ext cx="1800000" cy="270000"/>
           </a:xfrm>
           <a:prstGeom prst="rect">
@@ -7031,7 +7031,7 @@
         </p:blipFill>
         <p:spPr>
           <a:xfrm>
-            <a:off x="450000" y="2430000"/>
+            <a:off x="450000" y="2790000"/>
             <a:ext cx="1800000" cy="1800000"/>
           </a:xfrm>
           <a:prstGeom prst="rect">
@@ -7047,7 +7047,7 @@
         </p:nvSpPr>
         <p:spPr>
           <a:xfrm>
-            <a:off x="413999" y="4302000"/>
+            <a:off x="413999" y="4662000"/>
             <a:ext cx="1871999" cy="251999"/>
           </a:xfrm>
           <a:prstGeom prst="rect">
@@ -7082,7 +7082,7 @@
         </p:nvCxnSpPr>
         <p:spPr>
           <a:xfrm>
-            <a:off x="3491999" y="1908000"/>
+            <a:off x="3491999" y="2268000"/>
             <a:ext cx="0" cy="154800"/>
           </a:xfrm>
           <a:prstGeom prst="line">
@@ -7118,8 +7118,8 @@
         </p:nvSpPr>
         <p:spPr>
           <a:xfrm>
-            <a:off x="2484000" y="2070000"/>
-            <a:ext cx="2015999" cy="2951999"/>
+            <a:off x="2484000" y="2430000"/>
+            <a:ext cx="2015999" cy="2591999"/>
           </a:xfrm>
           <a:prstGeom prst="roundRect">
             <a:avLst>
@@ -7166,7 +7166,7 @@
         </p:nvSpPr>
         <p:spPr>
           <a:xfrm>
-            <a:off x="2591999" y="2124000"/>
+            <a:off x="2591999" y="2484000"/>
             <a:ext cx="1800000" cy="270000"/>
           </a:xfrm>
           <a:prstGeom prst="rect">
@@ -7209,7 +7209,7 @@
         </p:blipFill>
         <p:spPr>
           <a:xfrm>
-            <a:off x="2591999" y="2430000"/>
+            <a:off x="2591999" y="2790000"/>
             <a:ext cx="1800000" cy="1800000"/>
           </a:xfrm>
           <a:prstGeom prst="rect">
@@ -7225,7 +7225,7 @@
         </p:nvSpPr>
         <p:spPr>
           <a:xfrm>
-            <a:off x="2556000" y="4302000"/>
+            <a:off x="2556000" y="4662000"/>
             <a:ext cx="1871999" cy="251999"/>
           </a:xfrm>
           <a:prstGeom prst="rect">
@@ -7260,7 +7260,7 @@
         </p:nvCxnSpPr>
         <p:spPr>
           <a:xfrm>
-            <a:off x="5633999" y="1908000"/>
+            <a:off x="5633999" y="2268000"/>
             <a:ext cx="0" cy="154800"/>
           </a:xfrm>
           <a:prstGeom prst="line">
@@ -7296,8 +7296,8 @@
         </p:nvSpPr>
         <p:spPr>
           <a:xfrm>
-            <a:off x="4625999" y="2070000"/>
-            <a:ext cx="2015999" cy="2951999"/>
+            <a:off x="4625999" y="2430000"/>
+            <a:ext cx="2015999" cy="2591999"/>
           </a:xfrm>
           <a:prstGeom prst="roundRect">
             <a:avLst>
@@ -7344,7 +7344,7 @@
         </p:nvSpPr>
         <p:spPr>
           <a:xfrm>
-            <a:off x="4733999" y="2124000"/>
+            <a:off x="4733999" y="2484000"/>
             <a:ext cx="1800000" cy="270000"/>
           </a:xfrm>
           <a:prstGeom prst="rect">
@@ -7387,7 +7387,7 @@
         </p:blipFill>
         <p:spPr>
           <a:xfrm>
-            <a:off x="4733999" y="2430000"/>
+            <a:off x="4733999" y="2790000"/>
             <a:ext cx="1800000" cy="1800000"/>
           </a:xfrm>
           <a:prstGeom prst="rect">
@@ -7403,7 +7403,7 @@
         </p:nvSpPr>
         <p:spPr>
           <a:xfrm>
-            <a:off x="4697999" y="4302000"/>
+            <a:off x="4697999" y="4662000"/>
             <a:ext cx="1871999" cy="251999"/>
           </a:xfrm>
           <a:prstGeom prst="rect">
@@ -7438,7 +7438,7 @@
         </p:nvCxnSpPr>
         <p:spPr>
           <a:xfrm>
-            <a:off x="7775999" y="1908000"/>
+            <a:off x="7775999" y="2268000"/>
             <a:ext cx="0" cy="154800"/>
           </a:xfrm>
           <a:prstGeom prst="line">
@@ -7474,8 +7474,8 @@
         </p:nvSpPr>
         <p:spPr>
           <a:xfrm>
-            <a:off x="6767999" y="2070000"/>
-            <a:ext cx="2015999" cy="2951999"/>
+            <a:off x="6767999" y="2430000"/>
+            <a:ext cx="2015999" cy="2591999"/>
           </a:xfrm>
           <a:prstGeom prst="roundRect">
             <a:avLst>
@@ -7522,7 +7522,7 @@
         </p:nvSpPr>
         <p:spPr>
           <a:xfrm>
-            <a:off x="6875999" y="2124000"/>
+            <a:off x="6875999" y="2484000"/>
             <a:ext cx="1800000" cy="270000"/>
           </a:xfrm>
           <a:prstGeom prst="rect">
@@ -7565,7 +7565,7 @@
         </p:blipFill>
         <p:spPr>
           <a:xfrm>
-            <a:off x="6875999" y="2430000"/>
+            <a:off x="6875999" y="2790000"/>
             <a:ext cx="1800000" cy="1800000"/>
           </a:xfrm>
           <a:prstGeom prst="rect">
@@ -7581,7 +7581,7 @@
         </p:nvSpPr>
         <p:spPr>
           <a:xfrm>
-            <a:off x="6839999" y="4302000"/>
+            <a:off x="6839999" y="4662000"/>
             <a:ext cx="1871999" cy="251999"/>
           </a:xfrm>
           <a:prstGeom prst="rect">
@@ -7642,8 +7642,8 @@
         </p:blipFill>
         <p:spPr>
           <a:xfrm>
-            <a:off x="792000" y="198000"/>
-            <a:ext cx="1224000" cy="658800"/>
+            <a:off x="684000" y="270000"/>
+            <a:ext cx="1332000" cy="716400"/>
           </a:xfrm>
           <a:prstGeom prst="rect">
             <a:avLst/>
@@ -7666,8 +7666,8 @@
         </p:blipFill>
         <p:spPr>
           <a:xfrm>
-            <a:off x="792000" y="990000"/>
-            <a:ext cx="1224000" cy="658800"/>
+            <a:off x="684000" y="1242000"/>
+            <a:ext cx="1332000" cy="716400"/>
           </a:xfrm>
           <a:prstGeom prst="rect">
             <a:avLst/>
@@ -7682,8 +7682,8 @@
         </p:nvSpPr>
         <p:spPr>
           <a:xfrm>
-            <a:off x="72000" y="419400"/>
-            <a:ext cx="648000" cy="216000"/>
+            <a:off x="17999" y="520200"/>
+            <a:ext cx="612000" cy="216000"/>
           </a:xfrm>
           <a:prstGeom prst="rect">
             <a:avLst/>
@@ -7717,8 +7717,8 @@
         </p:nvSpPr>
         <p:spPr>
           <a:xfrm>
-            <a:off x="72000" y="1211400"/>
-            <a:ext cx="648000" cy="216000"/>
+            <a:off x="17999" y="1492200"/>
+            <a:ext cx="612000" cy="216000"/>
           </a:xfrm>
           <a:prstGeom prst="rect">
             <a:avLst/>
@@ -7752,7 +7752,7 @@
         </p:nvCxnSpPr>
         <p:spPr>
           <a:xfrm>
-            <a:off x="2015999" y="527400"/>
+            <a:off x="2015999" y="628200"/>
             <a:ext cx="216000" cy="0"/>
           </a:xfrm>
           <a:prstGeom prst="line">
@@ -7787,7 +7787,7 @@
         </p:nvCxnSpPr>
         <p:spPr>
           <a:xfrm>
-            <a:off x="2015999" y="1319400"/>
+            <a:off x="2015999" y="1600200"/>
             <a:ext cx="216000" cy="0"/>
           </a:xfrm>
           <a:prstGeom prst="line">
@@ -7822,8 +7822,8 @@
         </p:nvCxnSpPr>
         <p:spPr>
           <a:xfrm>
-            <a:off x="2231999" y="527400"/>
-            <a:ext cx="0" cy="792000"/>
+            <a:off x="2231999" y="628200"/>
+            <a:ext cx="0" cy="972000"/>
           </a:xfrm>
           <a:prstGeom prst="line">
             <a:avLst/>
@@ -7857,8 +7857,8 @@
         </p:nvCxnSpPr>
         <p:spPr>
           <a:xfrm>
-            <a:off x="2231999" y="923400"/>
-            <a:ext cx="288001" cy="0"/>
+            <a:off x="2231999" y="1114200"/>
+            <a:ext cx="144001" cy="0"/>
           </a:xfrm>
           <a:prstGeom prst="line">
             <a:avLst/>
@@ -7893,8 +7893,8 @@
         </p:nvSpPr>
         <p:spPr>
           <a:xfrm>
-            <a:off x="2520000" y="563400"/>
-            <a:ext cx="1080000" cy="720000"/>
+            <a:off x="2376000" y="700200"/>
+            <a:ext cx="1080000" cy="827999"/>
           </a:xfrm>
           <a:prstGeom prst="roundRect">
             <a:avLst>
@@ -7950,7 +7950,7 @@
         </p:nvSpPr>
         <p:spPr>
           <a:xfrm>
-            <a:off x="2340000" y="1326600"/>
+            <a:off x="2196000" y="1571400"/>
             <a:ext cx="1440000" cy="198000"/>
           </a:xfrm>
           <a:prstGeom prst="rect">
@@ -7985,8 +7985,8 @@
         </p:nvCxnSpPr>
         <p:spPr>
           <a:xfrm>
-            <a:off x="3600000" y="923400"/>
-            <a:ext cx="97200" cy="0"/>
+            <a:off x="3456000" y="1114200"/>
+            <a:ext cx="205200" cy="0"/>
           </a:xfrm>
           <a:prstGeom prst="line">
             <a:avLst/>
@@ -8021,8 +8021,8 @@
         </p:nvSpPr>
         <p:spPr>
           <a:xfrm>
-            <a:off x="3707999" y="125999"/>
-            <a:ext cx="192000" cy="189000"/>
+            <a:off x="3671999" y="162000"/>
+            <a:ext cx="200000" cy="225000"/>
           </a:xfrm>
           <a:prstGeom prst="rect">
             <a:avLst/>
@@ -8067,8 +8067,8 @@
         </p:nvSpPr>
         <p:spPr>
           <a:xfrm>
-            <a:off x="3899999" y="125999"/>
-            <a:ext cx="192000" cy="189000"/>
+            <a:off x="3871999" y="162000"/>
+            <a:ext cx="200000" cy="225000"/>
           </a:xfrm>
           <a:prstGeom prst="rect">
             <a:avLst/>
@@ -8113,8 +8113,8 @@
         </p:nvSpPr>
         <p:spPr>
           <a:xfrm>
-            <a:off x="4091999" y="125999"/>
-            <a:ext cx="192000" cy="189000"/>
+            <a:off x="4071999" y="162000"/>
+            <a:ext cx="200000" cy="225000"/>
           </a:xfrm>
           <a:prstGeom prst="rect">
             <a:avLst/>
@@ -8159,8 +8159,8 @@
         </p:nvSpPr>
         <p:spPr>
           <a:xfrm>
-            <a:off x="4283999" y="125999"/>
-            <a:ext cx="192000" cy="189000"/>
+            <a:off x="4271999" y="162000"/>
+            <a:ext cx="200000" cy="225000"/>
           </a:xfrm>
           <a:prstGeom prst="rect">
             <a:avLst/>
@@ -8205,8 +8205,8 @@
         </p:nvSpPr>
         <p:spPr>
           <a:xfrm>
-            <a:off x="4475999" y="125999"/>
-            <a:ext cx="192000" cy="189000"/>
+            <a:off x="4471999" y="162000"/>
+            <a:ext cx="200000" cy="225000"/>
           </a:xfrm>
           <a:prstGeom prst="rect">
             <a:avLst/>
@@ -8251,8 +8251,8 @@
         </p:nvSpPr>
         <p:spPr>
           <a:xfrm>
-            <a:off x="4667999" y="125999"/>
-            <a:ext cx="192000" cy="189000"/>
+            <a:off x="4672000" y="162000"/>
+            <a:ext cx="200000" cy="225000"/>
           </a:xfrm>
           <a:prstGeom prst="rect">
             <a:avLst/>
@@ -8297,8 +8297,8 @@
         </p:nvSpPr>
         <p:spPr>
           <a:xfrm>
-            <a:off x="4860000" y="125999"/>
-            <a:ext cx="192000" cy="189000"/>
+            <a:off x="4872000" y="162000"/>
+            <a:ext cx="200000" cy="225000"/>
           </a:xfrm>
           <a:prstGeom prst="rect">
             <a:avLst/>
@@ -8343,8 +8343,8 @@
         </p:nvSpPr>
         <p:spPr>
           <a:xfrm>
-            <a:off x="5051999" y="125999"/>
-            <a:ext cx="192000" cy="189000"/>
+            <a:off x="5072000" y="162000"/>
+            <a:ext cx="200000" cy="225000"/>
           </a:xfrm>
           <a:prstGeom prst="rect">
             <a:avLst/>
@@ -8389,8 +8389,8 @@
         </p:nvSpPr>
         <p:spPr>
           <a:xfrm>
-            <a:off x="5244000" y="125999"/>
-            <a:ext cx="192000" cy="189000"/>
+            <a:off x="5272000" y="162000"/>
+            <a:ext cx="200000" cy="225000"/>
           </a:xfrm>
           <a:prstGeom prst="rect">
             <a:avLst/>
@@ -8435,8 +8435,8 @@
         </p:nvSpPr>
         <p:spPr>
           <a:xfrm>
-            <a:off x="3707999" y="315000"/>
-            <a:ext cx="192000" cy="189000"/>
+            <a:off x="3671999" y="387000"/>
+            <a:ext cx="200000" cy="225000"/>
           </a:xfrm>
           <a:prstGeom prst="rect">
             <a:avLst/>
@@ -8481,8 +8481,8 @@
         </p:nvSpPr>
         <p:spPr>
           <a:xfrm>
-            <a:off x="3899999" y="315000"/>
-            <a:ext cx="192000" cy="189000"/>
+            <a:off x="3871999" y="387000"/>
+            <a:ext cx="200000" cy="225000"/>
           </a:xfrm>
           <a:prstGeom prst="rect">
             <a:avLst/>
@@ -8527,8 +8527,8 @@
         </p:nvSpPr>
         <p:spPr>
           <a:xfrm>
-            <a:off x="4091999" y="315000"/>
-            <a:ext cx="192000" cy="189000"/>
+            <a:off x="4071999" y="387000"/>
+            <a:ext cx="200000" cy="225000"/>
           </a:xfrm>
           <a:prstGeom prst="rect">
             <a:avLst/>
@@ -8573,8 +8573,8 @@
         </p:nvSpPr>
         <p:spPr>
           <a:xfrm>
-            <a:off x="4283999" y="315000"/>
-            <a:ext cx="192000" cy="189000"/>
+            <a:off x="4271999" y="387000"/>
+            <a:ext cx="200000" cy="225000"/>
           </a:xfrm>
           <a:prstGeom prst="rect">
             <a:avLst/>
@@ -8619,8 +8619,8 @@
         </p:nvSpPr>
         <p:spPr>
           <a:xfrm>
-            <a:off x="4475999" y="315000"/>
-            <a:ext cx="192000" cy="189000"/>
+            <a:off x="4471999" y="387000"/>
+            <a:ext cx="200000" cy="225000"/>
           </a:xfrm>
           <a:prstGeom prst="rect">
             <a:avLst/>
@@ -8665,8 +8665,8 @@
         </p:nvSpPr>
         <p:spPr>
           <a:xfrm>
-            <a:off x="4667999" y="315000"/>
-            <a:ext cx="192000" cy="189000"/>
+            <a:off x="4672000" y="387000"/>
+            <a:ext cx="200000" cy="225000"/>
           </a:xfrm>
           <a:prstGeom prst="rect">
             <a:avLst/>
@@ -8711,8 +8711,8 @@
         </p:nvSpPr>
         <p:spPr>
           <a:xfrm>
-            <a:off x="4860000" y="315000"/>
-            <a:ext cx="192000" cy="189000"/>
+            <a:off x="4872000" y="387000"/>
+            <a:ext cx="200000" cy="225000"/>
           </a:xfrm>
           <a:prstGeom prst="rect">
             <a:avLst/>
@@ -8757,8 +8757,8 @@
         </p:nvSpPr>
         <p:spPr>
           <a:xfrm>
-            <a:off x="5051999" y="315000"/>
-            <a:ext cx="192000" cy="189000"/>
+            <a:off x="5072000" y="387000"/>
+            <a:ext cx="200000" cy="225000"/>
           </a:xfrm>
           <a:prstGeom prst="rect">
             <a:avLst/>
@@ -8803,8 +8803,8 @@
         </p:nvSpPr>
         <p:spPr>
           <a:xfrm>
-            <a:off x="5244000" y="315000"/>
-            <a:ext cx="192000" cy="189000"/>
+            <a:off x="5272000" y="387000"/>
+            <a:ext cx="200000" cy="225000"/>
           </a:xfrm>
           <a:prstGeom prst="rect">
             <a:avLst/>
@@ -8849,8 +8849,8 @@
         </p:nvSpPr>
         <p:spPr>
           <a:xfrm>
-            <a:off x="3707999" y="503999"/>
-            <a:ext cx="192000" cy="189000"/>
+            <a:off x="3671999" y="612000"/>
+            <a:ext cx="200000" cy="225000"/>
           </a:xfrm>
           <a:prstGeom prst="rect">
             <a:avLst/>
@@ -8895,8 +8895,8 @@
         </p:nvSpPr>
         <p:spPr>
           <a:xfrm>
-            <a:off x="3899999" y="503999"/>
-            <a:ext cx="192000" cy="189000"/>
+            <a:off x="3871999" y="612000"/>
+            <a:ext cx="200000" cy="225000"/>
           </a:xfrm>
           <a:prstGeom prst="rect">
             <a:avLst/>
@@ -8941,8 +8941,8 @@
         </p:nvSpPr>
         <p:spPr>
           <a:xfrm>
-            <a:off x="4091999" y="503999"/>
-            <a:ext cx="192000" cy="189000"/>
+            <a:off x="4071999" y="612000"/>
+            <a:ext cx="200000" cy="225000"/>
           </a:xfrm>
           <a:prstGeom prst="rect">
             <a:avLst/>
@@ -8987,8 +8987,8 @@
         </p:nvSpPr>
         <p:spPr>
           <a:xfrm>
-            <a:off x="4283999" y="503999"/>
-            <a:ext cx="192000" cy="189000"/>
+            <a:off x="4271999" y="612000"/>
+            <a:ext cx="200000" cy="225000"/>
           </a:xfrm>
           <a:prstGeom prst="rect">
             <a:avLst/>
@@ -9033,8 +9033,8 @@
         </p:nvSpPr>
         <p:spPr>
           <a:xfrm>
-            <a:off x="4475999" y="503999"/>
-            <a:ext cx="192000" cy="189000"/>
+            <a:off x="4471999" y="612000"/>
+            <a:ext cx="200000" cy="225000"/>
           </a:xfrm>
           <a:prstGeom prst="rect">
             <a:avLst/>
@@ -9079,8 +9079,8 @@
         </p:nvSpPr>
         <p:spPr>
           <a:xfrm>
-            <a:off x="4667999" y="503999"/>
-            <a:ext cx="192000" cy="189000"/>
+            <a:off x="4672000" y="612000"/>
+            <a:ext cx="200000" cy="225000"/>
           </a:xfrm>
           <a:prstGeom prst="rect">
             <a:avLst/>
@@ -9125,8 +9125,8 @@
         </p:nvSpPr>
         <p:spPr>
           <a:xfrm>
-            <a:off x="4860000" y="503999"/>
-            <a:ext cx="192000" cy="189000"/>
+            <a:off x="4872000" y="612000"/>
+            <a:ext cx="200000" cy="225000"/>
           </a:xfrm>
           <a:prstGeom prst="rect">
             <a:avLst/>
@@ -9171,8 +9171,8 @@
         </p:nvSpPr>
         <p:spPr>
           <a:xfrm>
-            <a:off x="5051999" y="503999"/>
-            <a:ext cx="192000" cy="189000"/>
+            <a:off x="5072000" y="612000"/>
+            <a:ext cx="200000" cy="225000"/>
           </a:xfrm>
           <a:prstGeom prst="rect">
             <a:avLst/>
@@ -9217,8 +9217,8 @@
         </p:nvSpPr>
         <p:spPr>
           <a:xfrm>
-            <a:off x="5244000" y="503999"/>
-            <a:ext cx="192000" cy="189000"/>
+            <a:off x="5272000" y="612000"/>
+            <a:ext cx="200000" cy="225000"/>
           </a:xfrm>
           <a:prstGeom prst="rect">
             <a:avLst/>
@@ -9263,8 +9263,8 @@
         </p:nvSpPr>
         <p:spPr>
           <a:xfrm>
-            <a:off x="3707999" y="693000"/>
-            <a:ext cx="192000" cy="189000"/>
+            <a:off x="3671999" y="837000"/>
+            <a:ext cx="200000" cy="225000"/>
           </a:xfrm>
           <a:prstGeom prst="rect">
             <a:avLst/>
@@ -9309,8 +9309,8 @@
         </p:nvSpPr>
         <p:spPr>
           <a:xfrm>
-            <a:off x="3899999" y="693000"/>
-            <a:ext cx="192000" cy="189000"/>
+            <a:off x="3871999" y="837000"/>
+            <a:ext cx="200000" cy="225000"/>
           </a:xfrm>
           <a:prstGeom prst="rect">
             <a:avLst/>
@@ -9355,8 +9355,8 @@
         </p:nvSpPr>
         <p:spPr>
           <a:xfrm>
-            <a:off x="4091999" y="693000"/>
-            <a:ext cx="192000" cy="189000"/>
+            <a:off x="4071999" y="837000"/>
+            <a:ext cx="200000" cy="225000"/>
           </a:xfrm>
           <a:prstGeom prst="rect">
             <a:avLst/>
@@ -9401,8 +9401,8 @@
         </p:nvSpPr>
         <p:spPr>
           <a:xfrm>
-            <a:off x="4283999" y="693000"/>
-            <a:ext cx="192000" cy="189000"/>
+            <a:off x="4271999" y="837000"/>
+            <a:ext cx="200000" cy="225000"/>
           </a:xfrm>
           <a:prstGeom prst="rect">
             <a:avLst/>
@@ -9447,8 +9447,8 @@
         </p:nvSpPr>
         <p:spPr>
           <a:xfrm>
-            <a:off x="4475999" y="693000"/>
-            <a:ext cx="192000" cy="189000"/>
+            <a:off x="4471999" y="837000"/>
+            <a:ext cx="200000" cy="225000"/>
           </a:xfrm>
           <a:prstGeom prst="rect">
             <a:avLst/>
@@ -9493,8 +9493,8 @@
         </p:nvSpPr>
         <p:spPr>
           <a:xfrm>
-            <a:off x="4667999" y="693000"/>
-            <a:ext cx="192000" cy="189000"/>
+            <a:off x="4672000" y="837000"/>
+            <a:ext cx="200000" cy="225000"/>
           </a:xfrm>
           <a:prstGeom prst="rect">
             <a:avLst/>
@@ -9539,8 +9539,8 @@
         </p:nvSpPr>
         <p:spPr>
           <a:xfrm>
-            <a:off x="4860000" y="693000"/>
-            <a:ext cx="192000" cy="189000"/>
+            <a:off x="4872000" y="837000"/>
+            <a:ext cx="200000" cy="225000"/>
           </a:xfrm>
           <a:prstGeom prst="rect">
             <a:avLst/>
@@ -9585,8 +9585,8 @@
         </p:nvSpPr>
         <p:spPr>
           <a:xfrm>
-            <a:off x="5051999" y="693000"/>
-            <a:ext cx="192000" cy="189000"/>
+            <a:off x="5072000" y="837000"/>
+            <a:ext cx="200000" cy="225000"/>
           </a:xfrm>
           <a:prstGeom prst="rect">
             <a:avLst/>
@@ -9631,8 +9631,8 @@
         </p:nvSpPr>
         <p:spPr>
           <a:xfrm>
-            <a:off x="5244000" y="693000"/>
-            <a:ext cx="192000" cy="189000"/>
+            <a:off x="5272000" y="837000"/>
+            <a:ext cx="200000" cy="225000"/>
           </a:xfrm>
           <a:prstGeom prst="rect">
             <a:avLst/>
@@ -9677,8 +9677,8 @@
         </p:nvSpPr>
         <p:spPr>
           <a:xfrm>
-            <a:off x="3707999" y="882000"/>
-            <a:ext cx="192000" cy="189000"/>
+            <a:off x="3671999" y="1062000"/>
+            <a:ext cx="200000" cy="225000"/>
           </a:xfrm>
           <a:prstGeom prst="rect">
             <a:avLst/>
@@ -9723,8 +9723,8 @@
         </p:nvSpPr>
         <p:spPr>
           <a:xfrm>
-            <a:off x="3899999" y="882000"/>
-            <a:ext cx="192000" cy="189000"/>
+            <a:off x="3871999" y="1062000"/>
+            <a:ext cx="200000" cy="225000"/>
           </a:xfrm>
           <a:prstGeom prst="rect">
             <a:avLst/>
@@ -9769,8 +9769,8 @@
         </p:nvSpPr>
         <p:spPr>
           <a:xfrm>
-            <a:off x="4091999" y="882000"/>
-            <a:ext cx="192000" cy="189000"/>
+            <a:off x="4071999" y="1062000"/>
+            <a:ext cx="200000" cy="225000"/>
           </a:xfrm>
           <a:prstGeom prst="rect">
             <a:avLst/>
@@ -9815,8 +9815,8 @@
         </p:nvSpPr>
         <p:spPr>
           <a:xfrm>
-            <a:off x="4283999" y="882000"/>
-            <a:ext cx="192000" cy="189000"/>
+            <a:off x="4271999" y="1062000"/>
+            <a:ext cx="200000" cy="225000"/>
           </a:xfrm>
           <a:prstGeom prst="rect">
             <a:avLst/>
@@ -9861,8 +9861,8 @@
         </p:nvSpPr>
         <p:spPr>
           <a:xfrm>
-            <a:off x="4475999" y="882000"/>
-            <a:ext cx="192000" cy="189000"/>
+            <a:off x="4471999" y="1062000"/>
+            <a:ext cx="200000" cy="225000"/>
           </a:xfrm>
           <a:prstGeom prst="rect">
             <a:avLst/>
@@ -9907,8 +9907,8 @@
         </p:nvSpPr>
         <p:spPr>
           <a:xfrm>
-            <a:off x="4667999" y="882000"/>
-            <a:ext cx="192000" cy="189000"/>
+            <a:off x="4672000" y="1062000"/>
+            <a:ext cx="200000" cy="225000"/>
           </a:xfrm>
           <a:prstGeom prst="rect">
             <a:avLst/>
@@ -9953,8 +9953,8 @@
         </p:nvSpPr>
         <p:spPr>
           <a:xfrm>
-            <a:off x="4860000" y="882000"/>
-            <a:ext cx="192000" cy="189000"/>
+            <a:off x="4872000" y="1062000"/>
+            <a:ext cx="200000" cy="225000"/>
           </a:xfrm>
           <a:prstGeom prst="rect">
             <a:avLst/>
@@ -9999,8 +9999,8 @@
         </p:nvSpPr>
         <p:spPr>
           <a:xfrm>
-            <a:off x="5051999" y="882000"/>
-            <a:ext cx="192000" cy="189000"/>
+            <a:off x="5072000" y="1062000"/>
+            <a:ext cx="200000" cy="225000"/>
           </a:xfrm>
           <a:prstGeom prst="rect">
             <a:avLst/>
@@ -10045,8 +10045,8 @@
         </p:nvSpPr>
         <p:spPr>
           <a:xfrm>
-            <a:off x="5244000" y="882000"/>
-            <a:ext cx="192000" cy="189000"/>
+            <a:off x="5272000" y="1062000"/>
+            <a:ext cx="200000" cy="225000"/>
           </a:xfrm>
           <a:prstGeom prst="rect">
             <a:avLst/>
@@ -10091,8 +10091,8 @@
         </p:nvSpPr>
         <p:spPr>
           <a:xfrm>
-            <a:off x="3707999" y="1071000"/>
-            <a:ext cx="192000" cy="189000"/>
+            <a:off x="3671999" y="1287000"/>
+            <a:ext cx="200000" cy="225000"/>
           </a:xfrm>
           <a:prstGeom prst="rect">
             <a:avLst/>
@@ -10137,8 +10137,8 @@
         </p:nvSpPr>
         <p:spPr>
           <a:xfrm>
-            <a:off x="3899999" y="1071000"/>
-            <a:ext cx="192000" cy="189000"/>
+            <a:off x="3871999" y="1287000"/>
+            <a:ext cx="200000" cy="225000"/>
           </a:xfrm>
           <a:prstGeom prst="rect">
             <a:avLst/>
@@ -10183,8 +10183,8 @@
         </p:nvSpPr>
         <p:spPr>
           <a:xfrm>
-            <a:off x="4091999" y="1071000"/>
-            <a:ext cx="192000" cy="189000"/>
+            <a:off x="4071999" y="1287000"/>
+            <a:ext cx="200000" cy="225000"/>
           </a:xfrm>
           <a:prstGeom prst="rect">
             <a:avLst/>
@@ -10229,8 +10229,8 @@
         </p:nvSpPr>
         <p:spPr>
           <a:xfrm>
-            <a:off x="4283999" y="1071000"/>
-            <a:ext cx="192000" cy="189000"/>
+            <a:off x="4271999" y="1287000"/>
+            <a:ext cx="200000" cy="225000"/>
           </a:xfrm>
           <a:prstGeom prst="rect">
             <a:avLst/>
@@ -10275,8 +10275,8 @@
         </p:nvSpPr>
         <p:spPr>
           <a:xfrm>
-            <a:off x="4475999" y="1071000"/>
-            <a:ext cx="192000" cy="189000"/>
+            <a:off x="4471999" y="1287000"/>
+            <a:ext cx="200000" cy="225000"/>
           </a:xfrm>
           <a:prstGeom prst="rect">
             <a:avLst/>
@@ -10321,8 +10321,8 @@
         </p:nvSpPr>
         <p:spPr>
           <a:xfrm>
-            <a:off x="4667999" y="1071000"/>
-            <a:ext cx="192000" cy="189000"/>
+            <a:off x="4672000" y="1287000"/>
+            <a:ext cx="200000" cy="225000"/>
           </a:xfrm>
           <a:prstGeom prst="rect">
             <a:avLst/>
@@ -10367,8 +10367,8 @@
         </p:nvSpPr>
         <p:spPr>
           <a:xfrm>
-            <a:off x="4860000" y="1071000"/>
-            <a:ext cx="192000" cy="189000"/>
+            <a:off x="4872000" y="1287000"/>
+            <a:ext cx="200000" cy="225000"/>
           </a:xfrm>
           <a:prstGeom prst="rect">
             <a:avLst/>
@@ -10413,8 +10413,8 @@
         </p:nvSpPr>
         <p:spPr>
           <a:xfrm>
-            <a:off x="5051999" y="1071000"/>
-            <a:ext cx="192000" cy="189000"/>
+            <a:off x="5072000" y="1287000"/>
+            <a:ext cx="200000" cy="225000"/>
           </a:xfrm>
           <a:prstGeom prst="rect">
             <a:avLst/>
@@ -10459,8 +10459,8 @@
         </p:nvSpPr>
         <p:spPr>
           <a:xfrm>
-            <a:off x="5244000" y="1071000"/>
-            <a:ext cx="192000" cy="189000"/>
+            <a:off x="5272000" y="1287000"/>
+            <a:ext cx="200000" cy="225000"/>
           </a:xfrm>
           <a:prstGeom prst="rect">
             <a:avLst/>
@@ -10505,8 +10505,8 @@
         </p:nvSpPr>
         <p:spPr>
           <a:xfrm>
-            <a:off x="3707999" y="1260000"/>
-            <a:ext cx="192000" cy="189000"/>
+            <a:off x="3671999" y="1512000"/>
+            <a:ext cx="200000" cy="225000"/>
           </a:xfrm>
           <a:prstGeom prst="rect">
             <a:avLst/>
@@ -10551,8 +10551,8 @@
         </p:nvSpPr>
         <p:spPr>
           <a:xfrm>
-            <a:off x="3899999" y="1260000"/>
-            <a:ext cx="192000" cy="189000"/>
+            <a:off x="3871999" y="1512000"/>
+            <a:ext cx="200000" cy="225000"/>
           </a:xfrm>
           <a:prstGeom prst="rect">
             <a:avLst/>
@@ -10597,8 +10597,8 @@
         </p:nvSpPr>
         <p:spPr>
           <a:xfrm>
-            <a:off x="4091999" y="1260000"/>
-            <a:ext cx="192000" cy="189000"/>
+            <a:off x="4071999" y="1512000"/>
+            <a:ext cx="200000" cy="225000"/>
           </a:xfrm>
           <a:prstGeom prst="rect">
             <a:avLst/>
@@ -10643,8 +10643,8 @@
         </p:nvSpPr>
         <p:spPr>
           <a:xfrm>
-            <a:off x="4283999" y="1260000"/>
-            <a:ext cx="192000" cy="189000"/>
+            <a:off x="4271999" y="1512000"/>
+            <a:ext cx="200000" cy="225000"/>
           </a:xfrm>
           <a:prstGeom prst="rect">
             <a:avLst/>
@@ -10689,8 +10689,8 @@
         </p:nvSpPr>
         <p:spPr>
           <a:xfrm>
-            <a:off x="4475999" y="1260000"/>
-            <a:ext cx="192000" cy="189000"/>
+            <a:off x="4471999" y="1512000"/>
+            <a:ext cx="200000" cy="225000"/>
           </a:xfrm>
           <a:prstGeom prst="rect">
             <a:avLst/>
@@ -10735,8 +10735,8 @@
         </p:nvSpPr>
         <p:spPr>
           <a:xfrm>
-            <a:off x="4667999" y="1260000"/>
-            <a:ext cx="192000" cy="189000"/>
+            <a:off x="4672000" y="1512000"/>
+            <a:ext cx="200000" cy="225000"/>
           </a:xfrm>
           <a:prstGeom prst="rect">
             <a:avLst/>
@@ -10781,8 +10781,8 @@
         </p:nvSpPr>
         <p:spPr>
           <a:xfrm>
-            <a:off x="4860000" y="1260000"/>
-            <a:ext cx="192000" cy="189000"/>
+            <a:off x="4872000" y="1512000"/>
+            <a:ext cx="200000" cy="225000"/>
           </a:xfrm>
           <a:prstGeom prst="rect">
             <a:avLst/>
@@ -10827,8 +10827,8 @@
         </p:nvSpPr>
         <p:spPr>
           <a:xfrm>
-            <a:off x="5051999" y="1260000"/>
-            <a:ext cx="192000" cy="189000"/>
+            <a:off x="5072000" y="1512000"/>
+            <a:ext cx="200000" cy="225000"/>
           </a:xfrm>
           <a:prstGeom prst="rect">
             <a:avLst/>
@@ -10873,8 +10873,8 @@
         </p:nvSpPr>
         <p:spPr>
           <a:xfrm>
-            <a:off x="5244000" y="1260000"/>
-            <a:ext cx="192000" cy="189000"/>
+            <a:off x="5272000" y="1512000"/>
+            <a:ext cx="200000" cy="225000"/>
           </a:xfrm>
           <a:prstGeom prst="rect">
             <a:avLst/>
@@ -10919,8 +10919,8 @@
         </p:nvSpPr>
         <p:spPr>
           <a:xfrm>
-            <a:off x="3707999" y="1449000"/>
-            <a:ext cx="192000" cy="189000"/>
+            <a:off x="3671999" y="1737000"/>
+            <a:ext cx="200000" cy="225000"/>
           </a:xfrm>
           <a:prstGeom prst="rect">
             <a:avLst/>
@@ -10965,8 +10965,8 @@
         </p:nvSpPr>
         <p:spPr>
           <a:xfrm>
-            <a:off x="3899999" y="1449000"/>
-            <a:ext cx="192000" cy="189000"/>
+            <a:off x="3871999" y="1737000"/>
+            <a:ext cx="200000" cy="225000"/>
           </a:xfrm>
           <a:prstGeom prst="rect">
             <a:avLst/>
@@ -11011,8 +11011,8 @@
         </p:nvSpPr>
         <p:spPr>
           <a:xfrm>
-            <a:off x="4091999" y="1449000"/>
-            <a:ext cx="192000" cy="189000"/>
+            <a:off x="4071999" y="1737000"/>
+            <a:ext cx="200000" cy="225000"/>
           </a:xfrm>
           <a:prstGeom prst="rect">
             <a:avLst/>
@@ -11057,8 +11057,8 @@
         </p:nvSpPr>
         <p:spPr>
           <a:xfrm>
-            <a:off x="4283999" y="1449000"/>
-            <a:ext cx="192000" cy="189000"/>
+            <a:off x="4271999" y="1737000"/>
+            <a:ext cx="200000" cy="225000"/>
           </a:xfrm>
           <a:prstGeom prst="rect">
             <a:avLst/>
@@ -11103,8 +11103,8 @@
         </p:nvSpPr>
         <p:spPr>
           <a:xfrm>
-            <a:off x="4475999" y="1449000"/>
-            <a:ext cx="192000" cy="189000"/>
+            <a:off x="4471999" y="1737000"/>
+            <a:ext cx="200000" cy="225000"/>
           </a:xfrm>
           <a:prstGeom prst="rect">
             <a:avLst/>
@@ -11149,8 +11149,8 @@
         </p:nvSpPr>
         <p:spPr>
           <a:xfrm>
-            <a:off x="4667999" y="1449000"/>
-            <a:ext cx="192000" cy="189000"/>
+            <a:off x="4672000" y="1737000"/>
+            <a:ext cx="200000" cy="225000"/>
           </a:xfrm>
           <a:prstGeom prst="rect">
             <a:avLst/>
@@ -11195,8 +11195,8 @@
         </p:nvSpPr>
         <p:spPr>
           <a:xfrm>
-            <a:off x="4860000" y="1449000"/>
-            <a:ext cx="192000" cy="189000"/>
+            <a:off x="4872000" y="1737000"/>
+            <a:ext cx="200000" cy="225000"/>
           </a:xfrm>
           <a:prstGeom prst="rect">
             <a:avLst/>
@@ -11241,8 +11241,8 @@
         </p:nvSpPr>
         <p:spPr>
           <a:xfrm>
-            <a:off x="5051999" y="1449000"/>
-            <a:ext cx="192000" cy="189000"/>
+            <a:off x="5072000" y="1737000"/>
+            <a:ext cx="200000" cy="225000"/>
           </a:xfrm>
           <a:prstGeom prst="rect">
             <a:avLst/>
@@ -11287,8 +11287,8 @@
         </p:nvSpPr>
         <p:spPr>
           <a:xfrm>
-            <a:off x="5244000" y="1449000"/>
-            <a:ext cx="192000" cy="189000"/>
+            <a:off x="5272000" y="1737000"/>
+            <a:ext cx="200000" cy="225000"/>
           </a:xfrm>
           <a:prstGeom prst="rect">
             <a:avLst/>
@@ -11333,8 +11333,8 @@
         </p:nvSpPr>
         <p:spPr>
           <a:xfrm>
-            <a:off x="5561999" y="797400"/>
-            <a:ext cx="1440000" cy="251999"/>
+            <a:off x="5598000" y="936000"/>
+            <a:ext cx="1800000" cy="251999"/>
           </a:xfrm>
           <a:prstGeom prst="rect">
             <a:avLst/>
@@ -11368,8 +11368,8 @@
         </p:nvCxnSpPr>
         <p:spPr>
           <a:xfrm>
-            <a:off x="4572000" y="1638000"/>
-            <a:ext cx="0" cy="270000"/>
+            <a:off x="4572000" y="1962000"/>
+            <a:ext cx="0" cy="306000"/>
           </a:xfrm>
           <a:prstGeom prst="line">
             <a:avLst/>
@@ -11403,7 +11403,7 @@
         </p:nvCxnSpPr>
         <p:spPr>
           <a:xfrm>
-            <a:off x="1350000" y="1908000"/>
+            <a:off x="1350000" y="2268000"/>
             <a:ext cx="6425999" cy="0"/>
           </a:xfrm>
           <a:prstGeom prst="line">
@@ -11438,7 +11438,7 @@
         </p:nvCxnSpPr>
         <p:spPr>
           <a:xfrm>
-            <a:off x="1350000" y="1908000"/>
+            <a:off x="1350000" y="2268000"/>
             <a:ext cx="0" cy="154800"/>
           </a:xfrm>
           <a:prstGeom prst="line">
@@ -11474,8 +11474,8 @@
         </p:nvSpPr>
         <p:spPr>
           <a:xfrm>
-            <a:off x="342000" y="2070000"/>
-            <a:ext cx="2015999" cy="2951999"/>
+            <a:off x="342000" y="2430000"/>
+            <a:ext cx="2015999" cy="2591999"/>
           </a:xfrm>
           <a:prstGeom prst="roundRect">
             <a:avLst>
@@ -11522,7 +11522,7 @@
         </p:nvSpPr>
         <p:spPr>
           <a:xfrm>
-            <a:off x="450000" y="2124000"/>
+            <a:off x="450000" y="2484000"/>
             <a:ext cx="1800000" cy="270000"/>
           </a:xfrm>
           <a:prstGeom prst="rect">
@@ -11565,7 +11565,7 @@
         </p:blipFill>
         <p:spPr>
           <a:xfrm>
-            <a:off x="450000" y="2430000"/>
+            <a:off x="450000" y="2790000"/>
             <a:ext cx="1800000" cy="1800000"/>
           </a:xfrm>
           <a:prstGeom prst="rect">
@@ -11581,7 +11581,7 @@
         </p:nvSpPr>
         <p:spPr>
           <a:xfrm>
-            <a:off x="413999" y="4302000"/>
+            <a:off x="413999" y="4662000"/>
             <a:ext cx="1871999" cy="251999"/>
           </a:xfrm>
           <a:prstGeom prst="rect">
@@ -11616,7 +11616,7 @@
         </p:nvCxnSpPr>
         <p:spPr>
           <a:xfrm>
-            <a:off x="3491999" y="1908000"/>
+            <a:off x="3491999" y="2268000"/>
             <a:ext cx="0" cy="154800"/>
           </a:xfrm>
           <a:prstGeom prst="line">
@@ -11652,8 +11652,8 @@
         </p:nvSpPr>
         <p:spPr>
           <a:xfrm>
-            <a:off x="2484000" y="2070000"/>
-            <a:ext cx="2015999" cy="2951999"/>
+            <a:off x="2484000" y="2430000"/>
+            <a:ext cx="2015999" cy="2591999"/>
           </a:xfrm>
           <a:prstGeom prst="roundRect">
             <a:avLst>
@@ -11700,7 +11700,7 @@
         </p:nvSpPr>
         <p:spPr>
           <a:xfrm>
-            <a:off x="2591999" y="2124000"/>
+            <a:off x="2591999" y="2484000"/>
             <a:ext cx="1800000" cy="270000"/>
           </a:xfrm>
           <a:prstGeom prst="rect">
@@ -11743,7 +11743,7 @@
         </p:blipFill>
         <p:spPr>
           <a:xfrm>
-            <a:off x="2591999" y="2430000"/>
+            <a:off x="2591999" y="2790000"/>
             <a:ext cx="1800000" cy="1800000"/>
           </a:xfrm>
           <a:prstGeom prst="rect">
@@ -11759,7 +11759,7 @@
         </p:nvSpPr>
         <p:spPr>
           <a:xfrm>
-            <a:off x="2556000" y="4302000"/>
+            <a:off x="2556000" y="4662000"/>
             <a:ext cx="1871999" cy="251999"/>
           </a:xfrm>
           <a:prstGeom prst="rect">
@@ -11794,7 +11794,7 @@
         </p:nvCxnSpPr>
         <p:spPr>
           <a:xfrm>
-            <a:off x="5633999" y="1908000"/>
+            <a:off x="5633999" y="2268000"/>
             <a:ext cx="0" cy="154800"/>
           </a:xfrm>
           <a:prstGeom prst="line">
@@ -11830,8 +11830,8 @@
         </p:nvSpPr>
         <p:spPr>
           <a:xfrm>
-            <a:off x="4625999" y="2070000"/>
-            <a:ext cx="2015999" cy="2951999"/>
+            <a:off x="4625999" y="2430000"/>
+            <a:ext cx="2015999" cy="2591999"/>
           </a:xfrm>
           <a:prstGeom prst="roundRect">
             <a:avLst>
@@ -11878,7 +11878,7 @@
         </p:nvSpPr>
         <p:spPr>
           <a:xfrm>
-            <a:off x="4733999" y="2124000"/>
+            <a:off x="4733999" y="2484000"/>
             <a:ext cx="1800000" cy="270000"/>
           </a:xfrm>
           <a:prstGeom prst="rect">
@@ -11921,7 +11921,7 @@
         </p:blipFill>
         <p:spPr>
           <a:xfrm>
-            <a:off x="4733999" y="2430000"/>
+            <a:off x="4733999" y="2790000"/>
             <a:ext cx="1800000" cy="1800000"/>
           </a:xfrm>
           <a:prstGeom prst="rect">
@@ -11937,7 +11937,7 @@
         </p:nvSpPr>
         <p:spPr>
           <a:xfrm>
-            <a:off x="4697999" y="4302000"/>
+            <a:off x="4697999" y="4662000"/>
             <a:ext cx="1871999" cy="251999"/>
           </a:xfrm>
           <a:prstGeom prst="rect">
@@ -11972,7 +11972,7 @@
         </p:nvCxnSpPr>
         <p:spPr>
           <a:xfrm>
-            <a:off x="7775999" y="1908000"/>
+            <a:off x="7775999" y="2268000"/>
             <a:ext cx="0" cy="154800"/>
           </a:xfrm>
           <a:prstGeom prst="line">
@@ -12008,8 +12008,8 @@
         </p:nvSpPr>
         <p:spPr>
           <a:xfrm>
-            <a:off x="6767999" y="2070000"/>
-            <a:ext cx="2015999" cy="2951999"/>
+            <a:off x="6767999" y="2430000"/>
+            <a:ext cx="2015999" cy="2591999"/>
           </a:xfrm>
           <a:prstGeom prst="roundRect">
             <a:avLst>
@@ -12056,7 +12056,7 @@
         </p:nvSpPr>
         <p:spPr>
           <a:xfrm>
-            <a:off x="6875999" y="2124000"/>
+            <a:off x="6875999" y="2484000"/>
             <a:ext cx="1800000" cy="270000"/>
           </a:xfrm>
           <a:prstGeom prst="rect">
@@ -12099,7 +12099,7 @@
         </p:blipFill>
         <p:spPr>
           <a:xfrm>
-            <a:off x="6875999" y="2430000"/>
+            <a:off x="6875999" y="2790000"/>
             <a:ext cx="1800000" cy="1800000"/>
           </a:xfrm>
           <a:prstGeom prst="rect">
@@ -12115,7 +12115,7 @@
         </p:nvSpPr>
         <p:spPr>
           <a:xfrm>
-            <a:off x="6839999" y="4302000"/>
+            <a:off x="6839999" y="4662000"/>
             <a:ext cx="1871999" cy="251999"/>
           </a:xfrm>
           <a:prstGeom prst="rect">
@@ -12150,8 +12150,8 @@
         </p:nvSpPr>
         <p:spPr>
           <a:xfrm>
-            <a:off x="2429999" y="1925999"/>
-            <a:ext cx="2124000" cy="3167999"/>
+            <a:off x="2429999" y="2286000"/>
+            <a:ext cx="2124000" cy="2808000"/>
           </a:xfrm>
           <a:prstGeom prst="rect">
             <a:avLst/>
@@ -12196,8 +12196,8 @@
         </p:nvSpPr>
         <p:spPr>
           <a:xfrm>
-            <a:off x="4571999" y="1925999"/>
-            <a:ext cx="2124000" cy="3167999"/>
+            <a:off x="4571999" y="2286000"/>
+            <a:ext cx="2124000" cy="2808000"/>
           </a:xfrm>
           <a:prstGeom prst="rect">
             <a:avLst/>
@@ -12242,8 +12242,8 @@
         </p:nvSpPr>
         <p:spPr>
           <a:xfrm>
-            <a:off x="6713999" y="1925999"/>
-            <a:ext cx="2124000" cy="3167999"/>
+            <a:off x="6713999" y="2286000"/>
+            <a:ext cx="2124000" cy="2808000"/>
           </a:xfrm>
           <a:prstGeom prst="rect">
             <a:avLst/>
@@ -12314,8 +12314,8 @@
         </p:blipFill>
         <p:spPr>
           <a:xfrm>
-            <a:off x="792000" y="198000"/>
-            <a:ext cx="1224000" cy="658800"/>
+            <a:off x="684000" y="270000"/>
+            <a:ext cx="1332000" cy="716400"/>
           </a:xfrm>
           <a:prstGeom prst="rect">
             <a:avLst/>
@@ -12338,8 +12338,8 @@
         </p:blipFill>
         <p:spPr>
           <a:xfrm>
-            <a:off x="792000" y="990000"/>
-            <a:ext cx="1224000" cy="658800"/>
+            <a:off x="684000" y="1242000"/>
+            <a:ext cx="1332000" cy="716400"/>
           </a:xfrm>
           <a:prstGeom prst="rect">
             <a:avLst/>
@@ -12354,8 +12354,8 @@
         </p:nvSpPr>
         <p:spPr>
           <a:xfrm>
-            <a:off x="72000" y="419400"/>
-            <a:ext cx="648000" cy="216000"/>
+            <a:off x="17999" y="520200"/>
+            <a:ext cx="612000" cy="216000"/>
           </a:xfrm>
           <a:prstGeom prst="rect">
             <a:avLst/>
@@ -12389,8 +12389,8 @@
         </p:nvSpPr>
         <p:spPr>
           <a:xfrm>
-            <a:off x="72000" y="1211400"/>
-            <a:ext cx="648000" cy="216000"/>
+            <a:off x="17999" y="1492200"/>
+            <a:ext cx="612000" cy="216000"/>
           </a:xfrm>
           <a:prstGeom prst="rect">
             <a:avLst/>
@@ -12424,7 +12424,7 @@
         </p:nvCxnSpPr>
         <p:spPr>
           <a:xfrm>
-            <a:off x="2015999" y="527400"/>
+            <a:off x="2015999" y="628200"/>
             <a:ext cx="216000" cy="0"/>
           </a:xfrm>
           <a:prstGeom prst="line">
@@ -12459,7 +12459,7 @@
         </p:nvCxnSpPr>
         <p:spPr>
           <a:xfrm>
-            <a:off x="2015999" y="1319400"/>
+            <a:off x="2015999" y="1600200"/>
             <a:ext cx="216000" cy="0"/>
           </a:xfrm>
           <a:prstGeom prst="line">
@@ -12494,8 +12494,8 @@
         </p:nvCxnSpPr>
         <p:spPr>
           <a:xfrm>
-            <a:off x="2231999" y="527400"/>
-            <a:ext cx="0" cy="792000"/>
+            <a:off x="2231999" y="628200"/>
+            <a:ext cx="0" cy="972000"/>
           </a:xfrm>
           <a:prstGeom prst="line">
             <a:avLst/>
@@ -12529,8 +12529,8 @@
         </p:nvCxnSpPr>
         <p:spPr>
           <a:xfrm>
-            <a:off x="2231999" y="923400"/>
-            <a:ext cx="288001" cy="0"/>
+            <a:off x="2231999" y="1114200"/>
+            <a:ext cx="144001" cy="0"/>
           </a:xfrm>
           <a:prstGeom prst="line">
             <a:avLst/>
@@ -12565,8 +12565,8 @@
         </p:nvSpPr>
         <p:spPr>
           <a:xfrm>
-            <a:off x="2520000" y="563400"/>
-            <a:ext cx="1080000" cy="720000"/>
+            <a:off x="2376000" y="700200"/>
+            <a:ext cx="1080000" cy="827999"/>
           </a:xfrm>
           <a:prstGeom prst="roundRect">
             <a:avLst>
@@ -12622,7 +12622,7 @@
         </p:nvSpPr>
         <p:spPr>
           <a:xfrm>
-            <a:off x="2340000" y="1326600"/>
+            <a:off x="2196000" y="1571400"/>
             <a:ext cx="1440000" cy="198000"/>
           </a:xfrm>
           <a:prstGeom prst="rect">
@@ -12657,8 +12657,8 @@
         </p:nvCxnSpPr>
         <p:spPr>
           <a:xfrm>
-            <a:off x="3600000" y="923400"/>
-            <a:ext cx="97200" cy="0"/>
+            <a:off x="3456000" y="1114200"/>
+            <a:ext cx="205200" cy="0"/>
           </a:xfrm>
           <a:prstGeom prst="line">
             <a:avLst/>
@@ -12693,8 +12693,8 @@
         </p:nvSpPr>
         <p:spPr>
           <a:xfrm>
-            <a:off x="3707999" y="125999"/>
-            <a:ext cx="192000" cy="189000"/>
+            <a:off x="3671999" y="162000"/>
+            <a:ext cx="200000" cy="225000"/>
           </a:xfrm>
           <a:prstGeom prst="rect">
             <a:avLst/>
@@ -12739,8 +12739,8 @@
         </p:nvSpPr>
         <p:spPr>
           <a:xfrm>
-            <a:off x="3899999" y="125999"/>
-            <a:ext cx="192000" cy="189000"/>
+            <a:off x="3871999" y="162000"/>
+            <a:ext cx="200000" cy="225000"/>
           </a:xfrm>
           <a:prstGeom prst="rect">
             <a:avLst/>
@@ -12785,8 +12785,8 @@
         </p:nvSpPr>
         <p:spPr>
           <a:xfrm>
-            <a:off x="4091999" y="125999"/>
-            <a:ext cx="192000" cy="189000"/>
+            <a:off x="4071999" y="162000"/>
+            <a:ext cx="200000" cy="225000"/>
           </a:xfrm>
           <a:prstGeom prst="rect">
             <a:avLst/>
@@ -12831,8 +12831,8 @@
         </p:nvSpPr>
         <p:spPr>
           <a:xfrm>
-            <a:off x="4283999" y="125999"/>
-            <a:ext cx="192000" cy="189000"/>
+            <a:off x="4271999" y="162000"/>
+            <a:ext cx="200000" cy="225000"/>
           </a:xfrm>
           <a:prstGeom prst="rect">
             <a:avLst/>
@@ -12877,8 +12877,8 @@
         </p:nvSpPr>
         <p:spPr>
           <a:xfrm>
-            <a:off x="4475999" y="125999"/>
-            <a:ext cx="192000" cy="189000"/>
+            <a:off x="4471999" y="162000"/>
+            <a:ext cx="200000" cy="225000"/>
           </a:xfrm>
           <a:prstGeom prst="rect">
             <a:avLst/>
@@ -12923,8 +12923,8 @@
         </p:nvSpPr>
         <p:spPr>
           <a:xfrm>
-            <a:off x="4667999" y="125999"/>
-            <a:ext cx="192000" cy="189000"/>
+            <a:off x="4672000" y="162000"/>
+            <a:ext cx="200000" cy="225000"/>
           </a:xfrm>
           <a:prstGeom prst="rect">
             <a:avLst/>
@@ -12969,8 +12969,8 @@
         </p:nvSpPr>
         <p:spPr>
           <a:xfrm>
-            <a:off x="4860000" y="125999"/>
-            <a:ext cx="192000" cy="189000"/>
+            <a:off x="4872000" y="162000"/>
+            <a:ext cx="200000" cy="225000"/>
           </a:xfrm>
           <a:prstGeom prst="rect">
             <a:avLst/>
@@ -13015,8 +13015,8 @@
         </p:nvSpPr>
         <p:spPr>
           <a:xfrm>
-            <a:off x="5051999" y="125999"/>
-            <a:ext cx="192000" cy="189000"/>
+            <a:off x="5072000" y="162000"/>
+            <a:ext cx="200000" cy="225000"/>
           </a:xfrm>
           <a:prstGeom prst="rect">
             <a:avLst/>
@@ -13061,8 +13061,8 @@
         </p:nvSpPr>
         <p:spPr>
           <a:xfrm>
-            <a:off x="5244000" y="125999"/>
-            <a:ext cx="192000" cy="189000"/>
+            <a:off x="5272000" y="162000"/>
+            <a:ext cx="200000" cy="225000"/>
           </a:xfrm>
           <a:prstGeom prst="rect">
             <a:avLst/>
@@ -13107,8 +13107,8 @@
         </p:nvSpPr>
         <p:spPr>
           <a:xfrm>
-            <a:off x="3707999" y="315000"/>
-            <a:ext cx="192000" cy="189000"/>
+            <a:off x="3671999" y="387000"/>
+            <a:ext cx="200000" cy="225000"/>
           </a:xfrm>
           <a:prstGeom prst="rect">
             <a:avLst/>
@@ -13153,8 +13153,8 @@
         </p:nvSpPr>
         <p:spPr>
           <a:xfrm>
-            <a:off x="3899999" y="315000"/>
-            <a:ext cx="192000" cy="189000"/>
+            <a:off x="3871999" y="387000"/>
+            <a:ext cx="200000" cy="225000"/>
           </a:xfrm>
           <a:prstGeom prst="rect">
             <a:avLst/>
@@ -13199,8 +13199,8 @@
         </p:nvSpPr>
         <p:spPr>
           <a:xfrm>
-            <a:off x="4091999" y="315000"/>
-            <a:ext cx="192000" cy="189000"/>
+            <a:off x="4071999" y="387000"/>
+            <a:ext cx="200000" cy="225000"/>
           </a:xfrm>
           <a:prstGeom prst="rect">
             <a:avLst/>
@@ -13245,8 +13245,8 @@
         </p:nvSpPr>
         <p:spPr>
           <a:xfrm>
-            <a:off x="4283999" y="315000"/>
-            <a:ext cx="192000" cy="189000"/>
+            <a:off x="4271999" y="387000"/>
+            <a:ext cx="200000" cy="225000"/>
           </a:xfrm>
           <a:prstGeom prst="rect">
             <a:avLst/>
@@ -13291,8 +13291,8 @@
         </p:nvSpPr>
         <p:spPr>
           <a:xfrm>
-            <a:off x="4475999" y="315000"/>
-            <a:ext cx="192000" cy="189000"/>
+            <a:off x="4471999" y="387000"/>
+            <a:ext cx="200000" cy="225000"/>
           </a:xfrm>
           <a:prstGeom prst="rect">
             <a:avLst/>
@@ -13337,8 +13337,8 @@
         </p:nvSpPr>
         <p:spPr>
           <a:xfrm>
-            <a:off x="4667999" y="315000"/>
-            <a:ext cx="192000" cy="189000"/>
+            <a:off x="4672000" y="387000"/>
+            <a:ext cx="200000" cy="225000"/>
           </a:xfrm>
           <a:prstGeom prst="rect">
             <a:avLst/>
@@ -13383,8 +13383,8 @@
         </p:nvSpPr>
         <p:spPr>
           <a:xfrm>
-            <a:off x="4860000" y="315000"/>
-            <a:ext cx="192000" cy="189000"/>
+            <a:off x="4872000" y="387000"/>
+            <a:ext cx="200000" cy="225000"/>
           </a:xfrm>
           <a:prstGeom prst="rect">
             <a:avLst/>
@@ -13429,8 +13429,8 @@
         </p:nvSpPr>
         <p:spPr>
           <a:xfrm>
-            <a:off x="5051999" y="315000"/>
-            <a:ext cx="192000" cy="189000"/>
+            <a:off x="5072000" y="387000"/>
+            <a:ext cx="200000" cy="225000"/>
           </a:xfrm>
           <a:prstGeom prst="rect">
             <a:avLst/>
@@ -13475,8 +13475,8 @@
         </p:nvSpPr>
         <p:spPr>
           <a:xfrm>
-            <a:off x="5244000" y="315000"/>
-            <a:ext cx="192000" cy="189000"/>
+            <a:off x="5272000" y="387000"/>
+            <a:ext cx="200000" cy="225000"/>
           </a:xfrm>
           <a:prstGeom prst="rect">
             <a:avLst/>
@@ -13521,8 +13521,8 @@
         </p:nvSpPr>
         <p:spPr>
           <a:xfrm>
-            <a:off x="3707999" y="503999"/>
-            <a:ext cx="192000" cy="189000"/>
+            <a:off x="3671999" y="612000"/>
+            <a:ext cx="200000" cy="225000"/>
           </a:xfrm>
           <a:prstGeom prst="rect">
             <a:avLst/>
@@ -13567,8 +13567,8 @@
         </p:nvSpPr>
         <p:spPr>
           <a:xfrm>
-            <a:off x="3899999" y="503999"/>
-            <a:ext cx="192000" cy="189000"/>
+            <a:off x="3871999" y="612000"/>
+            <a:ext cx="200000" cy="225000"/>
           </a:xfrm>
           <a:prstGeom prst="rect">
             <a:avLst/>
@@ -13613,8 +13613,8 @@
         </p:nvSpPr>
         <p:spPr>
           <a:xfrm>
-            <a:off x="4091999" y="503999"/>
-            <a:ext cx="192000" cy="189000"/>
+            <a:off x="4071999" y="612000"/>
+            <a:ext cx="200000" cy="225000"/>
           </a:xfrm>
           <a:prstGeom prst="rect">
             <a:avLst/>
@@ -13659,8 +13659,8 @@
         </p:nvSpPr>
         <p:spPr>
           <a:xfrm>
-            <a:off x="4283999" y="503999"/>
-            <a:ext cx="192000" cy="189000"/>
+            <a:off x="4271999" y="612000"/>
+            <a:ext cx="200000" cy="225000"/>
           </a:xfrm>
           <a:prstGeom prst="rect">
             <a:avLst/>
@@ -13705,8 +13705,8 @@
         </p:nvSpPr>
         <p:spPr>
           <a:xfrm>
-            <a:off x="4475999" y="503999"/>
-            <a:ext cx="192000" cy="189000"/>
+            <a:off x="4471999" y="612000"/>
+            <a:ext cx="200000" cy="225000"/>
           </a:xfrm>
           <a:prstGeom prst="rect">
             <a:avLst/>
@@ -13751,8 +13751,8 @@
         </p:nvSpPr>
         <p:spPr>
           <a:xfrm>
-            <a:off x="4667999" y="503999"/>
-            <a:ext cx="192000" cy="189000"/>
+            <a:off x="4672000" y="612000"/>
+            <a:ext cx="200000" cy="225000"/>
           </a:xfrm>
           <a:prstGeom prst="rect">
             <a:avLst/>
@@ -13797,8 +13797,8 @@
         </p:nvSpPr>
         <p:spPr>
           <a:xfrm>
-            <a:off x="4860000" y="503999"/>
-            <a:ext cx="192000" cy="189000"/>
+            <a:off x="4872000" y="612000"/>
+            <a:ext cx="200000" cy="225000"/>
           </a:xfrm>
           <a:prstGeom prst="rect">
             <a:avLst/>
@@ -13843,8 +13843,8 @@
         </p:nvSpPr>
         <p:spPr>
           <a:xfrm>
-            <a:off x="5051999" y="503999"/>
-            <a:ext cx="192000" cy="189000"/>
+            <a:off x="5072000" y="612000"/>
+            <a:ext cx="200000" cy="225000"/>
           </a:xfrm>
           <a:prstGeom prst="rect">
             <a:avLst/>
@@ -13889,8 +13889,8 @@
         </p:nvSpPr>
         <p:spPr>
           <a:xfrm>
-            <a:off x="5244000" y="503999"/>
-            <a:ext cx="192000" cy="189000"/>
+            <a:off x="5272000" y="612000"/>
+            <a:ext cx="200000" cy="225000"/>
           </a:xfrm>
           <a:prstGeom prst="rect">
             <a:avLst/>
@@ -13935,8 +13935,8 @@
         </p:nvSpPr>
         <p:spPr>
           <a:xfrm>
-            <a:off x="3707999" y="693000"/>
-            <a:ext cx="192000" cy="189000"/>
+            <a:off x="3671999" y="837000"/>
+            <a:ext cx="200000" cy="225000"/>
           </a:xfrm>
           <a:prstGeom prst="rect">
             <a:avLst/>
@@ -13981,8 +13981,8 @@
         </p:nvSpPr>
         <p:spPr>
           <a:xfrm>
-            <a:off x="3899999" y="693000"/>
-            <a:ext cx="192000" cy="189000"/>
+            <a:off x="3871999" y="837000"/>
+            <a:ext cx="200000" cy="225000"/>
           </a:xfrm>
           <a:prstGeom prst="rect">
             <a:avLst/>
@@ -14027,8 +14027,8 @@
         </p:nvSpPr>
         <p:spPr>
           <a:xfrm>
-            <a:off x="4091999" y="693000"/>
-            <a:ext cx="192000" cy="189000"/>
+            <a:off x="4071999" y="837000"/>
+            <a:ext cx="200000" cy="225000"/>
           </a:xfrm>
           <a:prstGeom prst="rect">
             <a:avLst/>
@@ -14073,8 +14073,8 @@
         </p:nvSpPr>
         <p:spPr>
           <a:xfrm>
-            <a:off x="4283999" y="693000"/>
-            <a:ext cx="192000" cy="189000"/>
+            <a:off x="4271999" y="837000"/>
+            <a:ext cx="200000" cy="225000"/>
           </a:xfrm>
           <a:prstGeom prst="rect">
             <a:avLst/>
@@ -14119,8 +14119,8 @@
         </p:nvSpPr>
         <p:spPr>
           <a:xfrm>
-            <a:off x="4475999" y="693000"/>
-            <a:ext cx="192000" cy="189000"/>
+            <a:off x="4471999" y="837000"/>
+            <a:ext cx="200000" cy="225000"/>
           </a:xfrm>
           <a:prstGeom prst="rect">
             <a:avLst/>
@@ -14165,8 +14165,8 @@
         </p:nvSpPr>
         <p:spPr>
           <a:xfrm>
-            <a:off x="4667999" y="693000"/>
-            <a:ext cx="192000" cy="189000"/>
+            <a:off x="4672000" y="837000"/>
+            <a:ext cx="200000" cy="225000"/>
           </a:xfrm>
           <a:prstGeom prst="rect">
             <a:avLst/>
@@ -14211,8 +14211,8 @@
         </p:nvSpPr>
         <p:spPr>
           <a:xfrm>
-            <a:off x="4860000" y="693000"/>
-            <a:ext cx="192000" cy="189000"/>
+            <a:off x="4872000" y="837000"/>
+            <a:ext cx="200000" cy="225000"/>
           </a:xfrm>
           <a:prstGeom prst="rect">
             <a:avLst/>
@@ -14257,8 +14257,8 @@
         </p:nvSpPr>
         <p:spPr>
           <a:xfrm>
-            <a:off x="5051999" y="693000"/>
-            <a:ext cx="192000" cy="189000"/>
+            <a:off x="5072000" y="837000"/>
+            <a:ext cx="200000" cy="225000"/>
           </a:xfrm>
           <a:prstGeom prst="rect">
             <a:avLst/>
@@ -14303,8 +14303,8 @@
         </p:nvSpPr>
         <p:spPr>
           <a:xfrm>
-            <a:off x="5244000" y="693000"/>
-            <a:ext cx="192000" cy="189000"/>
+            <a:off x="5272000" y="837000"/>
+            <a:ext cx="200000" cy="225000"/>
           </a:xfrm>
           <a:prstGeom prst="rect">
             <a:avLst/>
@@ -14349,8 +14349,8 @@
         </p:nvSpPr>
         <p:spPr>
           <a:xfrm>
-            <a:off x="3707999" y="882000"/>
-            <a:ext cx="192000" cy="189000"/>
+            <a:off x="3671999" y="1062000"/>
+            <a:ext cx="200000" cy="225000"/>
           </a:xfrm>
           <a:prstGeom prst="rect">
             <a:avLst/>
@@ -14395,8 +14395,8 @@
         </p:nvSpPr>
         <p:spPr>
           <a:xfrm>
-            <a:off x="3899999" y="882000"/>
-            <a:ext cx="192000" cy="189000"/>
+            <a:off x="3871999" y="1062000"/>
+            <a:ext cx="200000" cy="225000"/>
           </a:xfrm>
           <a:prstGeom prst="rect">
             <a:avLst/>
@@ -14441,8 +14441,8 @@
         </p:nvSpPr>
         <p:spPr>
           <a:xfrm>
-            <a:off x="4091999" y="882000"/>
-            <a:ext cx="192000" cy="189000"/>
+            <a:off x="4071999" y="1062000"/>
+            <a:ext cx="200000" cy="225000"/>
           </a:xfrm>
           <a:prstGeom prst="rect">
             <a:avLst/>
@@ -14487,8 +14487,8 @@
         </p:nvSpPr>
         <p:spPr>
           <a:xfrm>
-            <a:off x="4283999" y="882000"/>
-            <a:ext cx="192000" cy="189000"/>
+            <a:off x="4271999" y="1062000"/>
+            <a:ext cx="200000" cy="225000"/>
           </a:xfrm>
           <a:prstGeom prst="rect">
             <a:avLst/>
@@ -14533,8 +14533,8 @@
         </p:nvSpPr>
         <p:spPr>
           <a:xfrm>
-            <a:off x="4475999" y="882000"/>
-            <a:ext cx="192000" cy="189000"/>
+            <a:off x="4471999" y="1062000"/>
+            <a:ext cx="200000" cy="225000"/>
           </a:xfrm>
           <a:prstGeom prst="rect">
             <a:avLst/>
@@ -14579,8 +14579,8 @@
         </p:nvSpPr>
         <p:spPr>
           <a:xfrm>
-            <a:off x="4667999" y="882000"/>
-            <a:ext cx="192000" cy="189000"/>
+            <a:off x="4672000" y="1062000"/>
+            <a:ext cx="200000" cy="225000"/>
           </a:xfrm>
           <a:prstGeom prst="rect">
             <a:avLst/>
@@ -14625,8 +14625,8 @@
         </p:nvSpPr>
         <p:spPr>
           <a:xfrm>
-            <a:off x="4860000" y="882000"/>
-            <a:ext cx="192000" cy="189000"/>
+            <a:off x="4872000" y="1062000"/>
+            <a:ext cx="200000" cy="225000"/>
           </a:xfrm>
           <a:prstGeom prst="rect">
             <a:avLst/>
@@ -14671,8 +14671,8 @@
         </p:nvSpPr>
         <p:spPr>
           <a:xfrm>
-            <a:off x="5051999" y="882000"/>
-            <a:ext cx="192000" cy="189000"/>
+            <a:off x="5072000" y="1062000"/>
+            <a:ext cx="200000" cy="225000"/>
           </a:xfrm>
           <a:prstGeom prst="rect">
             <a:avLst/>
@@ -14717,8 +14717,8 @@
         </p:nvSpPr>
         <p:spPr>
           <a:xfrm>
-            <a:off x="5244000" y="882000"/>
-            <a:ext cx="192000" cy="189000"/>
+            <a:off x="5272000" y="1062000"/>
+            <a:ext cx="200000" cy="225000"/>
           </a:xfrm>
           <a:prstGeom prst="rect">
             <a:avLst/>
@@ -14763,8 +14763,8 @@
         </p:nvSpPr>
         <p:spPr>
           <a:xfrm>
-            <a:off x="3707999" y="1071000"/>
-            <a:ext cx="192000" cy="189000"/>
+            <a:off x="3671999" y="1287000"/>
+            <a:ext cx="200000" cy="225000"/>
           </a:xfrm>
           <a:prstGeom prst="rect">
             <a:avLst/>
@@ -14809,8 +14809,8 @@
         </p:nvSpPr>
         <p:spPr>
           <a:xfrm>
-            <a:off x="3899999" y="1071000"/>
-            <a:ext cx="192000" cy="189000"/>
+            <a:off x="3871999" y="1287000"/>
+            <a:ext cx="200000" cy="225000"/>
           </a:xfrm>
           <a:prstGeom prst="rect">
             <a:avLst/>
@@ -14855,8 +14855,8 @@
         </p:nvSpPr>
         <p:spPr>
           <a:xfrm>
-            <a:off x="4091999" y="1071000"/>
-            <a:ext cx="192000" cy="189000"/>
+            <a:off x="4071999" y="1287000"/>
+            <a:ext cx="200000" cy="225000"/>
           </a:xfrm>
           <a:prstGeom prst="rect">
             <a:avLst/>
@@ -14901,8 +14901,8 @@
         </p:nvSpPr>
         <p:spPr>
           <a:xfrm>
-            <a:off x="4283999" y="1071000"/>
-            <a:ext cx="192000" cy="189000"/>
+            <a:off x="4271999" y="1287000"/>
+            <a:ext cx="200000" cy="225000"/>
           </a:xfrm>
           <a:prstGeom prst="rect">
             <a:avLst/>
@@ -14947,8 +14947,8 @@
         </p:nvSpPr>
         <p:spPr>
           <a:xfrm>
-            <a:off x="4475999" y="1071000"/>
-            <a:ext cx="192000" cy="189000"/>
+            <a:off x="4471999" y="1287000"/>
+            <a:ext cx="200000" cy="225000"/>
           </a:xfrm>
           <a:prstGeom prst="rect">
             <a:avLst/>
@@ -14993,8 +14993,8 @@
         </p:nvSpPr>
         <p:spPr>
           <a:xfrm>
-            <a:off x="4667999" y="1071000"/>
-            <a:ext cx="192000" cy="189000"/>
+            <a:off x="4672000" y="1287000"/>
+            <a:ext cx="200000" cy="225000"/>
           </a:xfrm>
           <a:prstGeom prst="rect">
             <a:avLst/>
@@ -15039,8 +15039,8 @@
         </p:nvSpPr>
         <p:spPr>
           <a:xfrm>
-            <a:off x="4860000" y="1071000"/>
-            <a:ext cx="192000" cy="189000"/>
+            <a:off x="4872000" y="1287000"/>
+            <a:ext cx="200000" cy="225000"/>
           </a:xfrm>
           <a:prstGeom prst="rect">
             <a:avLst/>
@@ -15085,8 +15085,8 @@
         </p:nvSpPr>
         <p:spPr>
           <a:xfrm>
-            <a:off x="5051999" y="1071000"/>
-            <a:ext cx="192000" cy="189000"/>
+            <a:off x="5072000" y="1287000"/>
+            <a:ext cx="200000" cy="225000"/>
           </a:xfrm>
           <a:prstGeom prst="rect">
             <a:avLst/>
@@ -15131,8 +15131,8 @@
         </p:nvSpPr>
         <p:spPr>
           <a:xfrm>
-            <a:off x="5244000" y="1071000"/>
-            <a:ext cx="192000" cy="189000"/>
+            <a:off x="5272000" y="1287000"/>
+            <a:ext cx="200000" cy="225000"/>
           </a:xfrm>
           <a:prstGeom prst="rect">
             <a:avLst/>
@@ -15177,8 +15177,8 @@
         </p:nvSpPr>
         <p:spPr>
           <a:xfrm>
-            <a:off x="3707999" y="1260000"/>
-            <a:ext cx="192000" cy="189000"/>
+            <a:off x="3671999" y="1512000"/>
+            <a:ext cx="200000" cy="225000"/>
           </a:xfrm>
           <a:prstGeom prst="rect">
             <a:avLst/>
@@ -15223,8 +15223,8 @@
         </p:nvSpPr>
         <p:spPr>
           <a:xfrm>
-            <a:off x="3899999" y="1260000"/>
-            <a:ext cx="192000" cy="189000"/>
+            <a:off x="3871999" y="1512000"/>
+            <a:ext cx="200000" cy="225000"/>
           </a:xfrm>
           <a:prstGeom prst="rect">
             <a:avLst/>
@@ -15269,8 +15269,8 @@
         </p:nvSpPr>
         <p:spPr>
           <a:xfrm>
-            <a:off x="4091999" y="1260000"/>
-            <a:ext cx="192000" cy="189000"/>
+            <a:off x="4071999" y="1512000"/>
+            <a:ext cx="200000" cy="225000"/>
           </a:xfrm>
           <a:prstGeom prst="rect">
             <a:avLst/>
@@ -15315,8 +15315,8 @@
         </p:nvSpPr>
         <p:spPr>
           <a:xfrm>
-            <a:off x="4283999" y="1260000"/>
-            <a:ext cx="192000" cy="189000"/>
+            <a:off x="4271999" y="1512000"/>
+            <a:ext cx="200000" cy="225000"/>
           </a:xfrm>
           <a:prstGeom prst="rect">
             <a:avLst/>
@@ -15361,8 +15361,8 @@
         </p:nvSpPr>
         <p:spPr>
           <a:xfrm>
-            <a:off x="4475999" y="1260000"/>
-            <a:ext cx="192000" cy="189000"/>
+            <a:off x="4471999" y="1512000"/>
+            <a:ext cx="200000" cy="225000"/>
           </a:xfrm>
           <a:prstGeom prst="rect">
             <a:avLst/>
@@ -15407,8 +15407,8 @@
         </p:nvSpPr>
         <p:spPr>
           <a:xfrm>
-            <a:off x="4667999" y="1260000"/>
-            <a:ext cx="192000" cy="189000"/>
+            <a:off x="4672000" y="1512000"/>
+            <a:ext cx="200000" cy="225000"/>
           </a:xfrm>
           <a:prstGeom prst="rect">
             <a:avLst/>
@@ -15453,8 +15453,8 @@
         </p:nvSpPr>
         <p:spPr>
           <a:xfrm>
-            <a:off x="4860000" y="1260000"/>
-            <a:ext cx="192000" cy="189000"/>
+            <a:off x="4872000" y="1512000"/>
+            <a:ext cx="200000" cy="225000"/>
           </a:xfrm>
           <a:prstGeom prst="rect">
             <a:avLst/>
@@ -15499,8 +15499,8 @@
         </p:nvSpPr>
         <p:spPr>
           <a:xfrm>
-            <a:off x="5051999" y="1260000"/>
-            <a:ext cx="192000" cy="189000"/>
+            <a:off x="5072000" y="1512000"/>
+            <a:ext cx="200000" cy="225000"/>
           </a:xfrm>
           <a:prstGeom prst="rect">
             <a:avLst/>
@@ -15545,8 +15545,8 @@
         </p:nvSpPr>
         <p:spPr>
           <a:xfrm>
-            <a:off x="5244000" y="1260000"/>
-            <a:ext cx="192000" cy="189000"/>
+            <a:off x="5272000" y="1512000"/>
+            <a:ext cx="200000" cy="225000"/>
           </a:xfrm>
           <a:prstGeom prst="rect">
             <a:avLst/>
@@ -15591,8 +15591,8 @@
         </p:nvSpPr>
         <p:spPr>
           <a:xfrm>
-            <a:off x="3707999" y="1449000"/>
-            <a:ext cx="192000" cy="189000"/>
+            <a:off x="3671999" y="1737000"/>
+            <a:ext cx="200000" cy="225000"/>
           </a:xfrm>
           <a:prstGeom prst="rect">
             <a:avLst/>
@@ -15637,8 +15637,8 @@
         </p:nvSpPr>
         <p:spPr>
           <a:xfrm>
-            <a:off x="3899999" y="1449000"/>
-            <a:ext cx="192000" cy="189000"/>
+            <a:off x="3871999" y="1737000"/>
+            <a:ext cx="200000" cy="225000"/>
           </a:xfrm>
           <a:prstGeom prst="rect">
             <a:avLst/>
@@ -15683,8 +15683,8 @@
         </p:nvSpPr>
         <p:spPr>
           <a:xfrm>
-            <a:off x="4091999" y="1449000"/>
-            <a:ext cx="192000" cy="189000"/>
+            <a:off x="4071999" y="1737000"/>
+            <a:ext cx="200000" cy="225000"/>
           </a:xfrm>
           <a:prstGeom prst="rect">
             <a:avLst/>
@@ -15729,8 +15729,8 @@
         </p:nvSpPr>
         <p:spPr>
           <a:xfrm>
-            <a:off x="4283999" y="1449000"/>
-            <a:ext cx="192000" cy="189000"/>
+            <a:off x="4271999" y="1737000"/>
+            <a:ext cx="200000" cy="225000"/>
           </a:xfrm>
           <a:prstGeom prst="rect">
             <a:avLst/>
@@ -15775,8 +15775,8 @@
         </p:nvSpPr>
         <p:spPr>
           <a:xfrm>
-            <a:off x="4475999" y="1449000"/>
-            <a:ext cx="192000" cy="189000"/>
+            <a:off x="4471999" y="1737000"/>
+            <a:ext cx="200000" cy="225000"/>
           </a:xfrm>
           <a:prstGeom prst="rect">
             <a:avLst/>
@@ -15821,8 +15821,8 @@
         </p:nvSpPr>
         <p:spPr>
           <a:xfrm>
-            <a:off x="4667999" y="1449000"/>
-            <a:ext cx="192000" cy="189000"/>
+            <a:off x="4672000" y="1737000"/>
+            <a:ext cx="200000" cy="225000"/>
           </a:xfrm>
           <a:prstGeom prst="rect">
             <a:avLst/>
@@ -15867,8 +15867,8 @@
         </p:nvSpPr>
         <p:spPr>
           <a:xfrm>
-            <a:off x="4860000" y="1449000"/>
-            <a:ext cx="192000" cy="189000"/>
+            <a:off x="4872000" y="1737000"/>
+            <a:ext cx="200000" cy="225000"/>
           </a:xfrm>
           <a:prstGeom prst="rect">
             <a:avLst/>
@@ -15913,8 +15913,8 @@
         </p:nvSpPr>
         <p:spPr>
           <a:xfrm>
-            <a:off x="5051999" y="1449000"/>
-            <a:ext cx="192000" cy="189000"/>
+            <a:off x="5072000" y="1737000"/>
+            <a:ext cx="200000" cy="225000"/>
           </a:xfrm>
           <a:prstGeom prst="rect">
             <a:avLst/>
@@ -15959,8 +15959,8 @@
         </p:nvSpPr>
         <p:spPr>
           <a:xfrm>
-            <a:off x="5244000" y="1449000"/>
-            <a:ext cx="192000" cy="189000"/>
+            <a:off x="5272000" y="1737000"/>
+            <a:ext cx="200000" cy="225000"/>
           </a:xfrm>
           <a:prstGeom prst="rect">
             <a:avLst/>
@@ -16005,8 +16005,8 @@
         </p:nvSpPr>
         <p:spPr>
           <a:xfrm>
-            <a:off x="5561999" y="797400"/>
-            <a:ext cx="1440000" cy="251999"/>
+            <a:off x="5598000" y="936000"/>
+            <a:ext cx="1800000" cy="251999"/>
           </a:xfrm>
           <a:prstGeom prst="rect">
             <a:avLst/>
@@ -16040,8 +16040,8 @@
         </p:nvCxnSpPr>
         <p:spPr>
           <a:xfrm>
-            <a:off x="4572000" y="1638000"/>
-            <a:ext cx="0" cy="270000"/>
+            <a:off x="4572000" y="1962000"/>
+            <a:ext cx="0" cy="306000"/>
           </a:xfrm>
           <a:prstGeom prst="line">
             <a:avLst/>
@@ -16075,7 +16075,7 @@
         </p:nvCxnSpPr>
         <p:spPr>
           <a:xfrm>
-            <a:off x="1350000" y="1908000"/>
+            <a:off x="1350000" y="2268000"/>
             <a:ext cx="6425999" cy="0"/>
           </a:xfrm>
           <a:prstGeom prst="line">
@@ -16110,7 +16110,7 @@
         </p:nvCxnSpPr>
         <p:spPr>
           <a:xfrm>
-            <a:off x="1350000" y="1908000"/>
+            <a:off x="1350000" y="2268000"/>
             <a:ext cx="0" cy="154800"/>
           </a:xfrm>
           <a:prstGeom prst="line">
@@ -16146,8 +16146,8 @@
         </p:nvSpPr>
         <p:spPr>
           <a:xfrm>
-            <a:off x="342000" y="2070000"/>
-            <a:ext cx="2015999" cy="2951999"/>
+            <a:off x="342000" y="2430000"/>
+            <a:ext cx="2015999" cy="2591999"/>
           </a:xfrm>
           <a:prstGeom prst="roundRect">
             <a:avLst>
@@ -16194,7 +16194,7 @@
         </p:nvSpPr>
         <p:spPr>
           <a:xfrm>
-            <a:off x="450000" y="2124000"/>
+            <a:off x="450000" y="2484000"/>
             <a:ext cx="1800000" cy="270000"/>
           </a:xfrm>
           <a:prstGeom prst="rect">
@@ -16237,7 +16237,7 @@
         </p:blipFill>
         <p:spPr>
           <a:xfrm>
-            <a:off x="450000" y="2430000"/>
+            <a:off x="450000" y="2790000"/>
             <a:ext cx="1800000" cy="1800000"/>
           </a:xfrm>
           <a:prstGeom prst="rect">
@@ -16253,7 +16253,7 @@
         </p:nvSpPr>
         <p:spPr>
           <a:xfrm>
-            <a:off x="413999" y="4302000"/>
+            <a:off x="413999" y="4662000"/>
             <a:ext cx="1871999" cy="251999"/>
           </a:xfrm>
           <a:prstGeom prst="rect">
@@ -16288,7 +16288,7 @@
         </p:nvCxnSpPr>
         <p:spPr>
           <a:xfrm>
-            <a:off x="3491999" y="1908000"/>
+            <a:off x="3491999" y="2268000"/>
             <a:ext cx="0" cy="154800"/>
           </a:xfrm>
           <a:prstGeom prst="line">
@@ -16324,8 +16324,8 @@
         </p:nvSpPr>
         <p:spPr>
           <a:xfrm>
-            <a:off x="2484000" y="2070000"/>
-            <a:ext cx="2015999" cy="2951999"/>
+            <a:off x="2484000" y="2430000"/>
+            <a:ext cx="2015999" cy="2591999"/>
           </a:xfrm>
           <a:prstGeom prst="roundRect">
             <a:avLst>
@@ -16372,7 +16372,7 @@
         </p:nvSpPr>
         <p:spPr>
           <a:xfrm>
-            <a:off x="2591999" y="2124000"/>
+            <a:off x="2591999" y="2484000"/>
             <a:ext cx="1800000" cy="270000"/>
           </a:xfrm>
           <a:prstGeom prst="rect">
@@ -16415,7 +16415,7 @@
         </p:blipFill>
         <p:spPr>
           <a:xfrm>
-            <a:off x="2591999" y="2430000"/>
+            <a:off x="2591999" y="2790000"/>
             <a:ext cx="1800000" cy="1800000"/>
           </a:xfrm>
           <a:prstGeom prst="rect">
@@ -16431,7 +16431,7 @@
         </p:nvSpPr>
         <p:spPr>
           <a:xfrm>
-            <a:off x="2556000" y="4302000"/>
+            <a:off x="2556000" y="4662000"/>
             <a:ext cx="1871999" cy="251999"/>
           </a:xfrm>
           <a:prstGeom prst="rect">
@@ -16466,7 +16466,7 @@
         </p:nvCxnSpPr>
         <p:spPr>
           <a:xfrm>
-            <a:off x="5633999" y="1908000"/>
+            <a:off x="5633999" y="2268000"/>
             <a:ext cx="0" cy="154800"/>
           </a:xfrm>
           <a:prstGeom prst="line">
@@ -16502,8 +16502,8 @@
         </p:nvSpPr>
         <p:spPr>
           <a:xfrm>
-            <a:off x="4625999" y="2070000"/>
-            <a:ext cx="2015999" cy="2951999"/>
+            <a:off x="4625999" y="2430000"/>
+            <a:ext cx="2015999" cy="2591999"/>
           </a:xfrm>
           <a:prstGeom prst="roundRect">
             <a:avLst>
@@ -16550,7 +16550,7 @@
         </p:nvSpPr>
         <p:spPr>
           <a:xfrm>
-            <a:off x="4733999" y="2124000"/>
+            <a:off x="4733999" y="2484000"/>
             <a:ext cx="1800000" cy="270000"/>
           </a:xfrm>
           <a:prstGeom prst="rect">
@@ -16593,7 +16593,7 @@
         </p:blipFill>
         <p:spPr>
           <a:xfrm>
-            <a:off x="4733999" y="2430000"/>
+            <a:off x="4733999" y="2790000"/>
             <a:ext cx="1800000" cy="1800000"/>
           </a:xfrm>
           <a:prstGeom prst="rect">
@@ -16609,7 +16609,7 @@
         </p:nvSpPr>
         <p:spPr>
           <a:xfrm>
-            <a:off x="4697999" y="4302000"/>
+            <a:off x="4697999" y="4662000"/>
             <a:ext cx="1871999" cy="251999"/>
           </a:xfrm>
           <a:prstGeom prst="rect">
@@ -16644,7 +16644,7 @@
         </p:nvCxnSpPr>
         <p:spPr>
           <a:xfrm>
-            <a:off x="7775999" y="1908000"/>
+            <a:off x="7775999" y="2268000"/>
             <a:ext cx="0" cy="154800"/>
           </a:xfrm>
           <a:prstGeom prst="line">
@@ -16680,8 +16680,8 @@
         </p:nvSpPr>
         <p:spPr>
           <a:xfrm>
-            <a:off x="6767999" y="2070000"/>
-            <a:ext cx="2015999" cy="2951999"/>
+            <a:off x="6767999" y="2430000"/>
+            <a:ext cx="2015999" cy="2591999"/>
           </a:xfrm>
           <a:prstGeom prst="roundRect">
             <a:avLst>
@@ -16728,7 +16728,7 @@
         </p:nvSpPr>
         <p:spPr>
           <a:xfrm>
-            <a:off x="6875999" y="2124000"/>
+            <a:off x="6875999" y="2484000"/>
             <a:ext cx="1800000" cy="270000"/>
           </a:xfrm>
           <a:prstGeom prst="rect">
@@ -16771,7 +16771,7 @@
         </p:blipFill>
         <p:spPr>
           <a:xfrm>
-            <a:off x="6875999" y="2430000"/>
+            <a:off x="6875999" y="2790000"/>
             <a:ext cx="1800000" cy="1800000"/>
           </a:xfrm>
           <a:prstGeom prst="rect">
@@ -16787,7 +16787,7 @@
         </p:nvSpPr>
         <p:spPr>
           <a:xfrm>
-            <a:off x="6839999" y="4302000"/>
+            <a:off x="6839999" y="4662000"/>
             <a:ext cx="1871999" cy="251999"/>
           </a:xfrm>
           <a:prstGeom prst="rect">
@@ -16822,8 +16822,8 @@
         </p:nvSpPr>
         <p:spPr>
           <a:xfrm>
-            <a:off x="288000" y="1925999"/>
-            <a:ext cx="2124000" cy="3167999"/>
+            <a:off x="288000" y="2286000"/>
+            <a:ext cx="2124000" cy="2808000"/>
           </a:xfrm>
           <a:prstGeom prst="rect">
             <a:avLst/>
@@ -16868,8 +16868,8 @@
         </p:nvSpPr>
         <p:spPr>
           <a:xfrm>
-            <a:off x="4571999" y="1925999"/>
-            <a:ext cx="2124000" cy="3167999"/>
+            <a:off x="4571999" y="2286000"/>
+            <a:ext cx="2124000" cy="2808000"/>
           </a:xfrm>
           <a:prstGeom prst="rect">
             <a:avLst/>
@@ -16914,8 +16914,8 @@
         </p:nvSpPr>
         <p:spPr>
           <a:xfrm>
-            <a:off x="6713999" y="1925999"/>
-            <a:ext cx="2124000" cy="3167999"/>
+            <a:off x="6713999" y="2286000"/>
+            <a:ext cx="2124000" cy="2808000"/>
           </a:xfrm>
           <a:prstGeom prst="rect">
             <a:avLst/>
@@ -16986,8 +16986,8 @@
         </p:blipFill>
         <p:spPr>
           <a:xfrm>
-            <a:off x="792000" y="198000"/>
-            <a:ext cx="1224000" cy="658800"/>
+            <a:off x="684000" y="270000"/>
+            <a:ext cx="1332000" cy="716400"/>
           </a:xfrm>
           <a:prstGeom prst="rect">
             <a:avLst/>
@@ -17010,8 +17010,8 @@
         </p:blipFill>
         <p:spPr>
           <a:xfrm>
-            <a:off x="792000" y="990000"/>
-            <a:ext cx="1224000" cy="658800"/>
+            <a:off x="684000" y="1242000"/>
+            <a:ext cx="1332000" cy="716400"/>
           </a:xfrm>
           <a:prstGeom prst="rect">
             <a:avLst/>
@@ -17026,8 +17026,8 @@
         </p:nvSpPr>
         <p:spPr>
           <a:xfrm>
-            <a:off x="72000" y="419400"/>
-            <a:ext cx="648000" cy="216000"/>
+            <a:off x="17999" y="520200"/>
+            <a:ext cx="612000" cy="216000"/>
           </a:xfrm>
           <a:prstGeom prst="rect">
             <a:avLst/>
@@ -17061,8 +17061,8 @@
         </p:nvSpPr>
         <p:spPr>
           <a:xfrm>
-            <a:off x="72000" y="1211400"/>
-            <a:ext cx="648000" cy="216000"/>
+            <a:off x="17999" y="1492200"/>
+            <a:ext cx="612000" cy="216000"/>
           </a:xfrm>
           <a:prstGeom prst="rect">
             <a:avLst/>
@@ -17096,7 +17096,7 @@
         </p:nvCxnSpPr>
         <p:spPr>
           <a:xfrm>
-            <a:off x="2015999" y="527400"/>
+            <a:off x="2015999" y="628200"/>
             <a:ext cx="216000" cy="0"/>
           </a:xfrm>
           <a:prstGeom prst="line">
@@ -17131,7 +17131,7 @@
         </p:nvCxnSpPr>
         <p:spPr>
           <a:xfrm>
-            <a:off x="2015999" y="1319400"/>
+            <a:off x="2015999" y="1600200"/>
             <a:ext cx="216000" cy="0"/>
           </a:xfrm>
           <a:prstGeom prst="line">
@@ -17166,8 +17166,8 @@
         </p:nvCxnSpPr>
         <p:spPr>
           <a:xfrm>
-            <a:off x="2231999" y="527400"/>
-            <a:ext cx="0" cy="792000"/>
+            <a:off x="2231999" y="628200"/>
+            <a:ext cx="0" cy="972000"/>
           </a:xfrm>
           <a:prstGeom prst="line">
             <a:avLst/>
@@ -17201,8 +17201,8 @@
         </p:nvCxnSpPr>
         <p:spPr>
           <a:xfrm>
-            <a:off x="2231999" y="923400"/>
-            <a:ext cx="288001" cy="0"/>
+            <a:off x="2231999" y="1114200"/>
+            <a:ext cx="144001" cy="0"/>
           </a:xfrm>
           <a:prstGeom prst="line">
             <a:avLst/>
@@ -17237,8 +17237,8 @@
         </p:nvSpPr>
         <p:spPr>
           <a:xfrm>
-            <a:off x="2520000" y="563400"/>
-            <a:ext cx="1080000" cy="720000"/>
+            <a:off x="2376000" y="700200"/>
+            <a:ext cx="1080000" cy="827999"/>
           </a:xfrm>
           <a:prstGeom prst="roundRect">
             <a:avLst>
@@ -17294,7 +17294,7 @@
         </p:nvSpPr>
         <p:spPr>
           <a:xfrm>
-            <a:off x="2340000" y="1326600"/>
+            <a:off x="2196000" y="1571400"/>
             <a:ext cx="1440000" cy="198000"/>
           </a:xfrm>
           <a:prstGeom prst="rect">
@@ -17329,8 +17329,8 @@
         </p:nvCxnSpPr>
         <p:spPr>
           <a:xfrm>
-            <a:off x="3600000" y="923400"/>
-            <a:ext cx="97200" cy="0"/>
+            <a:off x="3456000" y="1114200"/>
+            <a:ext cx="205200" cy="0"/>
           </a:xfrm>
           <a:prstGeom prst="line">
             <a:avLst/>
@@ -17365,8 +17365,8 @@
         </p:nvSpPr>
         <p:spPr>
           <a:xfrm>
-            <a:off x="3707999" y="125999"/>
-            <a:ext cx="192000" cy="189000"/>
+            <a:off x="3671999" y="162000"/>
+            <a:ext cx="200000" cy="225000"/>
           </a:xfrm>
           <a:prstGeom prst="rect">
             <a:avLst/>
@@ -17411,8 +17411,8 @@
         </p:nvSpPr>
         <p:spPr>
           <a:xfrm>
-            <a:off x="3899999" y="125999"/>
-            <a:ext cx="192000" cy="189000"/>
+            <a:off x="3871999" y="162000"/>
+            <a:ext cx="200000" cy="225000"/>
           </a:xfrm>
           <a:prstGeom prst="rect">
             <a:avLst/>
@@ -17457,8 +17457,8 @@
         </p:nvSpPr>
         <p:spPr>
           <a:xfrm>
-            <a:off x="4091999" y="125999"/>
-            <a:ext cx="192000" cy="189000"/>
+            <a:off x="4071999" y="162000"/>
+            <a:ext cx="200000" cy="225000"/>
           </a:xfrm>
           <a:prstGeom prst="rect">
             <a:avLst/>
@@ -17503,8 +17503,8 @@
         </p:nvSpPr>
         <p:spPr>
           <a:xfrm>
-            <a:off x="4283999" y="125999"/>
-            <a:ext cx="192000" cy="189000"/>
+            <a:off x="4271999" y="162000"/>
+            <a:ext cx="200000" cy="225000"/>
           </a:xfrm>
           <a:prstGeom prst="rect">
             <a:avLst/>
@@ -17549,8 +17549,8 @@
         </p:nvSpPr>
         <p:spPr>
           <a:xfrm>
-            <a:off x="4475999" y="125999"/>
-            <a:ext cx="192000" cy="189000"/>
+            <a:off x="4471999" y="162000"/>
+            <a:ext cx="200000" cy="225000"/>
           </a:xfrm>
           <a:prstGeom prst="rect">
             <a:avLst/>
@@ -17595,8 +17595,8 @@
         </p:nvSpPr>
         <p:spPr>
           <a:xfrm>
-            <a:off x="4667999" y="125999"/>
-            <a:ext cx="192000" cy="189000"/>
+            <a:off x="4672000" y="162000"/>
+            <a:ext cx="200000" cy="225000"/>
           </a:xfrm>
           <a:prstGeom prst="rect">
             <a:avLst/>
@@ -17641,8 +17641,8 @@
         </p:nvSpPr>
         <p:spPr>
           <a:xfrm>
-            <a:off x="4860000" y="125999"/>
-            <a:ext cx="192000" cy="189000"/>
+            <a:off x="4872000" y="162000"/>
+            <a:ext cx="200000" cy="225000"/>
           </a:xfrm>
           <a:prstGeom prst="rect">
             <a:avLst/>
@@ -17687,8 +17687,8 @@
         </p:nvSpPr>
         <p:spPr>
           <a:xfrm>
-            <a:off x="5051999" y="125999"/>
-            <a:ext cx="192000" cy="189000"/>
+            <a:off x="5072000" y="162000"/>
+            <a:ext cx="200000" cy="225000"/>
           </a:xfrm>
           <a:prstGeom prst="rect">
             <a:avLst/>
@@ -17733,8 +17733,8 @@
         </p:nvSpPr>
         <p:spPr>
           <a:xfrm>
-            <a:off x="5244000" y="125999"/>
-            <a:ext cx="192000" cy="189000"/>
+            <a:off x="5272000" y="162000"/>
+            <a:ext cx="200000" cy="225000"/>
           </a:xfrm>
           <a:prstGeom prst="rect">
             <a:avLst/>
@@ -17779,8 +17779,8 @@
         </p:nvSpPr>
         <p:spPr>
           <a:xfrm>
-            <a:off x="3707999" y="315000"/>
-            <a:ext cx="192000" cy="189000"/>
+            <a:off x="3671999" y="387000"/>
+            <a:ext cx="200000" cy="225000"/>
           </a:xfrm>
           <a:prstGeom prst="rect">
             <a:avLst/>
@@ -17825,8 +17825,8 @@
         </p:nvSpPr>
         <p:spPr>
           <a:xfrm>
-            <a:off x="3899999" y="315000"/>
-            <a:ext cx="192000" cy="189000"/>
+            <a:off x="3871999" y="387000"/>
+            <a:ext cx="200000" cy="225000"/>
           </a:xfrm>
           <a:prstGeom prst="rect">
             <a:avLst/>
@@ -17871,8 +17871,8 @@
         </p:nvSpPr>
         <p:spPr>
           <a:xfrm>
-            <a:off x="4091999" y="315000"/>
-            <a:ext cx="192000" cy="189000"/>
+            <a:off x="4071999" y="387000"/>
+            <a:ext cx="200000" cy="225000"/>
           </a:xfrm>
           <a:prstGeom prst="rect">
             <a:avLst/>
@@ -17917,8 +17917,8 @@
         </p:nvSpPr>
         <p:spPr>
           <a:xfrm>
-            <a:off x="4283999" y="315000"/>
-            <a:ext cx="192000" cy="189000"/>
+            <a:off x="4271999" y="387000"/>
+            <a:ext cx="200000" cy="225000"/>
           </a:xfrm>
           <a:prstGeom prst="rect">
             <a:avLst/>
@@ -17963,8 +17963,8 @@
         </p:nvSpPr>
         <p:spPr>
           <a:xfrm>
-            <a:off x="4475999" y="315000"/>
-            <a:ext cx="192000" cy="189000"/>
+            <a:off x="4471999" y="387000"/>
+            <a:ext cx="200000" cy="225000"/>
           </a:xfrm>
           <a:prstGeom prst="rect">
             <a:avLst/>
@@ -18009,8 +18009,8 @@
         </p:nvSpPr>
         <p:spPr>
           <a:xfrm>
-            <a:off x="4667999" y="315000"/>
-            <a:ext cx="192000" cy="189000"/>
+            <a:off x="4672000" y="387000"/>
+            <a:ext cx="200000" cy="225000"/>
           </a:xfrm>
           <a:prstGeom prst="rect">
             <a:avLst/>
@@ -18055,8 +18055,8 @@
         </p:nvSpPr>
         <p:spPr>
           <a:xfrm>
-            <a:off x="4860000" y="315000"/>
-            <a:ext cx="192000" cy="189000"/>
+            <a:off x="4872000" y="387000"/>
+            <a:ext cx="200000" cy="225000"/>
           </a:xfrm>
           <a:prstGeom prst="rect">
             <a:avLst/>
@@ -18101,8 +18101,8 @@
         </p:nvSpPr>
         <p:spPr>
           <a:xfrm>
-            <a:off x="5051999" y="315000"/>
-            <a:ext cx="192000" cy="189000"/>
+            <a:off x="5072000" y="387000"/>
+            <a:ext cx="200000" cy="225000"/>
           </a:xfrm>
           <a:prstGeom prst="rect">
             <a:avLst/>
@@ -18147,8 +18147,8 @@
         </p:nvSpPr>
         <p:spPr>
           <a:xfrm>
-            <a:off x="5244000" y="315000"/>
-            <a:ext cx="192000" cy="189000"/>
+            <a:off x="5272000" y="387000"/>
+            <a:ext cx="200000" cy="225000"/>
           </a:xfrm>
           <a:prstGeom prst="rect">
             <a:avLst/>
@@ -18193,8 +18193,8 @@
         </p:nvSpPr>
         <p:spPr>
           <a:xfrm>
-            <a:off x="3707999" y="503999"/>
-            <a:ext cx="192000" cy="189000"/>
+            <a:off x="3671999" y="612000"/>
+            <a:ext cx="200000" cy="225000"/>
           </a:xfrm>
           <a:prstGeom prst="rect">
             <a:avLst/>
@@ -18239,8 +18239,8 @@
         </p:nvSpPr>
         <p:spPr>
           <a:xfrm>
-            <a:off x="3899999" y="503999"/>
-            <a:ext cx="192000" cy="189000"/>
+            <a:off x="3871999" y="612000"/>
+            <a:ext cx="200000" cy="225000"/>
           </a:xfrm>
           <a:prstGeom prst="rect">
             <a:avLst/>
@@ -18285,8 +18285,8 @@
         </p:nvSpPr>
         <p:spPr>
           <a:xfrm>
-            <a:off x="4091999" y="503999"/>
-            <a:ext cx="192000" cy="189000"/>
+            <a:off x="4071999" y="612000"/>
+            <a:ext cx="200000" cy="225000"/>
           </a:xfrm>
           <a:prstGeom prst="rect">
             <a:avLst/>
@@ -18331,8 +18331,8 @@
         </p:nvSpPr>
         <p:spPr>
           <a:xfrm>
-            <a:off x="4283999" y="503999"/>
-            <a:ext cx="192000" cy="189000"/>
+            <a:off x="4271999" y="612000"/>
+            <a:ext cx="200000" cy="225000"/>
           </a:xfrm>
           <a:prstGeom prst="rect">
             <a:avLst/>
@@ -18377,8 +18377,8 @@
         </p:nvSpPr>
         <p:spPr>
           <a:xfrm>
-            <a:off x="4475999" y="503999"/>
-            <a:ext cx="192000" cy="189000"/>
+            <a:off x="4471999" y="612000"/>
+            <a:ext cx="200000" cy="225000"/>
           </a:xfrm>
           <a:prstGeom prst="rect">
             <a:avLst/>
@@ -18423,8 +18423,8 @@
         </p:nvSpPr>
         <p:spPr>
           <a:xfrm>
-            <a:off x="4667999" y="503999"/>
-            <a:ext cx="192000" cy="189000"/>
+            <a:off x="4672000" y="612000"/>
+            <a:ext cx="200000" cy="225000"/>
           </a:xfrm>
           <a:prstGeom prst="rect">
             <a:avLst/>
@@ -18469,8 +18469,8 @@
         </p:nvSpPr>
         <p:spPr>
           <a:xfrm>
-            <a:off x="4860000" y="503999"/>
-            <a:ext cx="192000" cy="189000"/>
+            <a:off x="4872000" y="612000"/>
+            <a:ext cx="200000" cy="225000"/>
           </a:xfrm>
           <a:prstGeom prst="rect">
             <a:avLst/>
@@ -18515,8 +18515,8 @@
         </p:nvSpPr>
         <p:spPr>
           <a:xfrm>
-            <a:off x="5051999" y="503999"/>
-            <a:ext cx="192000" cy="189000"/>
+            <a:off x="5072000" y="612000"/>
+            <a:ext cx="200000" cy="225000"/>
           </a:xfrm>
           <a:prstGeom prst="rect">
             <a:avLst/>
@@ -18561,8 +18561,8 @@
         </p:nvSpPr>
         <p:spPr>
           <a:xfrm>
-            <a:off x="5244000" y="503999"/>
-            <a:ext cx="192000" cy="189000"/>
+            <a:off x="5272000" y="612000"/>
+            <a:ext cx="200000" cy="225000"/>
           </a:xfrm>
           <a:prstGeom prst="rect">
             <a:avLst/>
@@ -18607,8 +18607,8 @@
         </p:nvSpPr>
         <p:spPr>
           <a:xfrm>
-            <a:off x="3707999" y="693000"/>
-            <a:ext cx="192000" cy="189000"/>
+            <a:off x="3671999" y="837000"/>
+            <a:ext cx="200000" cy="225000"/>
           </a:xfrm>
           <a:prstGeom prst="rect">
             <a:avLst/>
@@ -18653,8 +18653,8 @@
         </p:nvSpPr>
         <p:spPr>
           <a:xfrm>
-            <a:off x="3899999" y="693000"/>
-            <a:ext cx="192000" cy="189000"/>
+            <a:off x="3871999" y="837000"/>
+            <a:ext cx="200000" cy="225000"/>
           </a:xfrm>
           <a:prstGeom prst="rect">
             <a:avLst/>
@@ -18699,8 +18699,8 @@
         </p:nvSpPr>
         <p:spPr>
           <a:xfrm>
-            <a:off x="4091999" y="693000"/>
-            <a:ext cx="192000" cy="189000"/>
+            <a:off x="4071999" y="837000"/>
+            <a:ext cx="200000" cy="225000"/>
           </a:xfrm>
           <a:prstGeom prst="rect">
             <a:avLst/>
@@ -18745,8 +18745,8 @@
         </p:nvSpPr>
         <p:spPr>
           <a:xfrm>
-            <a:off x="4283999" y="693000"/>
-            <a:ext cx="192000" cy="189000"/>
+            <a:off x="4271999" y="837000"/>
+            <a:ext cx="200000" cy="225000"/>
           </a:xfrm>
           <a:prstGeom prst="rect">
             <a:avLst/>
@@ -18791,8 +18791,8 @@
         </p:nvSpPr>
         <p:spPr>
           <a:xfrm>
-            <a:off x="4475999" y="693000"/>
-            <a:ext cx="192000" cy="189000"/>
+            <a:off x="4471999" y="837000"/>
+            <a:ext cx="200000" cy="225000"/>
           </a:xfrm>
           <a:prstGeom prst="rect">
             <a:avLst/>
@@ -18837,8 +18837,8 @@
         </p:nvSpPr>
         <p:spPr>
           <a:xfrm>
-            <a:off x="4667999" y="693000"/>
-            <a:ext cx="192000" cy="189000"/>
+            <a:off x="4672000" y="837000"/>
+            <a:ext cx="200000" cy="225000"/>
           </a:xfrm>
           <a:prstGeom prst="rect">
             <a:avLst/>
@@ -18883,8 +18883,8 @@
         </p:nvSpPr>
         <p:spPr>
           <a:xfrm>
-            <a:off x="4860000" y="693000"/>
-            <a:ext cx="192000" cy="189000"/>
+            <a:off x="4872000" y="837000"/>
+            <a:ext cx="200000" cy="225000"/>
           </a:xfrm>
           <a:prstGeom prst="rect">
             <a:avLst/>
@@ -18929,8 +18929,8 @@
         </p:nvSpPr>
         <p:spPr>
           <a:xfrm>
-            <a:off x="5051999" y="693000"/>
-            <a:ext cx="192000" cy="189000"/>
+            <a:off x="5072000" y="837000"/>
+            <a:ext cx="200000" cy="225000"/>
           </a:xfrm>
           <a:prstGeom prst="rect">
             <a:avLst/>
@@ -18975,8 +18975,8 @@
         </p:nvSpPr>
         <p:spPr>
           <a:xfrm>
-            <a:off x="5244000" y="693000"/>
-            <a:ext cx="192000" cy="189000"/>
+            <a:off x="5272000" y="837000"/>
+            <a:ext cx="200000" cy="225000"/>
           </a:xfrm>
           <a:prstGeom prst="rect">
             <a:avLst/>
@@ -19021,8 +19021,8 @@
         </p:nvSpPr>
         <p:spPr>
           <a:xfrm>
-            <a:off x="3707999" y="882000"/>
-            <a:ext cx="192000" cy="189000"/>
+            <a:off x="3671999" y="1062000"/>
+            <a:ext cx="200000" cy="225000"/>
           </a:xfrm>
           <a:prstGeom prst="rect">
             <a:avLst/>
@@ -19067,8 +19067,8 @@
         </p:nvSpPr>
         <p:spPr>
           <a:xfrm>
-            <a:off x="3899999" y="882000"/>
-            <a:ext cx="192000" cy="189000"/>
+            <a:off x="3871999" y="1062000"/>
+            <a:ext cx="200000" cy="225000"/>
           </a:xfrm>
           <a:prstGeom prst="rect">
             <a:avLst/>
@@ -19113,8 +19113,8 @@
         </p:nvSpPr>
         <p:spPr>
           <a:xfrm>
-            <a:off x="4091999" y="882000"/>
-            <a:ext cx="192000" cy="189000"/>
+            <a:off x="4071999" y="1062000"/>
+            <a:ext cx="200000" cy="225000"/>
           </a:xfrm>
           <a:prstGeom prst="rect">
             <a:avLst/>
@@ -19159,8 +19159,8 @@
         </p:nvSpPr>
         <p:spPr>
           <a:xfrm>
-            <a:off x="4283999" y="882000"/>
-            <a:ext cx="192000" cy="189000"/>
+            <a:off x="4271999" y="1062000"/>
+            <a:ext cx="200000" cy="225000"/>
           </a:xfrm>
           <a:prstGeom prst="rect">
             <a:avLst/>
@@ -19205,8 +19205,8 @@
         </p:nvSpPr>
         <p:spPr>
           <a:xfrm>
-            <a:off x="4475999" y="882000"/>
-            <a:ext cx="192000" cy="189000"/>
+            <a:off x="4471999" y="1062000"/>
+            <a:ext cx="200000" cy="225000"/>
           </a:xfrm>
           <a:prstGeom prst="rect">
             <a:avLst/>
@@ -19251,8 +19251,8 @@
         </p:nvSpPr>
         <p:spPr>
           <a:xfrm>
-            <a:off x="4667999" y="882000"/>
-            <a:ext cx="192000" cy="189000"/>
+            <a:off x="4672000" y="1062000"/>
+            <a:ext cx="200000" cy="225000"/>
           </a:xfrm>
           <a:prstGeom prst="rect">
             <a:avLst/>
@@ -19297,8 +19297,8 @@
         </p:nvSpPr>
         <p:spPr>
           <a:xfrm>
-            <a:off x="4860000" y="882000"/>
-            <a:ext cx="192000" cy="189000"/>
+            <a:off x="4872000" y="1062000"/>
+            <a:ext cx="200000" cy="225000"/>
           </a:xfrm>
           <a:prstGeom prst="rect">
             <a:avLst/>
@@ -19343,8 +19343,8 @@
         </p:nvSpPr>
         <p:spPr>
           <a:xfrm>
-            <a:off x="5051999" y="882000"/>
-            <a:ext cx="192000" cy="189000"/>
+            <a:off x="5072000" y="1062000"/>
+            <a:ext cx="200000" cy="225000"/>
           </a:xfrm>
           <a:prstGeom prst="rect">
             <a:avLst/>
@@ -19389,8 +19389,8 @@
         </p:nvSpPr>
         <p:spPr>
           <a:xfrm>
-            <a:off x="5244000" y="882000"/>
-            <a:ext cx="192000" cy="189000"/>
+            <a:off x="5272000" y="1062000"/>
+            <a:ext cx="200000" cy="225000"/>
           </a:xfrm>
           <a:prstGeom prst="rect">
             <a:avLst/>
@@ -19435,8 +19435,8 @@
         </p:nvSpPr>
         <p:spPr>
           <a:xfrm>
-            <a:off x="3707999" y="1071000"/>
-            <a:ext cx="192000" cy="189000"/>
+            <a:off x="3671999" y="1287000"/>
+            <a:ext cx="200000" cy="225000"/>
           </a:xfrm>
           <a:prstGeom prst="rect">
             <a:avLst/>
@@ -19481,8 +19481,8 @@
         </p:nvSpPr>
         <p:spPr>
           <a:xfrm>
-            <a:off x="3899999" y="1071000"/>
-            <a:ext cx="192000" cy="189000"/>
+            <a:off x="3871999" y="1287000"/>
+            <a:ext cx="200000" cy="225000"/>
           </a:xfrm>
           <a:prstGeom prst="rect">
             <a:avLst/>
@@ -19527,8 +19527,8 @@
         </p:nvSpPr>
         <p:spPr>
           <a:xfrm>
-            <a:off x="4091999" y="1071000"/>
-            <a:ext cx="192000" cy="189000"/>
+            <a:off x="4071999" y="1287000"/>
+            <a:ext cx="200000" cy="225000"/>
           </a:xfrm>
           <a:prstGeom prst="rect">
             <a:avLst/>
@@ -19573,8 +19573,8 @@
         </p:nvSpPr>
         <p:spPr>
           <a:xfrm>
-            <a:off x="4283999" y="1071000"/>
-            <a:ext cx="192000" cy="189000"/>
+            <a:off x="4271999" y="1287000"/>
+            <a:ext cx="200000" cy="225000"/>
           </a:xfrm>
           <a:prstGeom prst="rect">
             <a:avLst/>
@@ -19619,8 +19619,8 @@
         </p:nvSpPr>
         <p:spPr>
           <a:xfrm>
-            <a:off x="4475999" y="1071000"/>
-            <a:ext cx="192000" cy="189000"/>
+            <a:off x="4471999" y="1287000"/>
+            <a:ext cx="200000" cy="225000"/>
           </a:xfrm>
           <a:prstGeom prst="rect">
             <a:avLst/>
@@ -19665,8 +19665,8 @@
         </p:nvSpPr>
         <p:spPr>
           <a:xfrm>
-            <a:off x="4667999" y="1071000"/>
-            <a:ext cx="192000" cy="189000"/>
+            <a:off x="4672000" y="1287000"/>
+            <a:ext cx="200000" cy="225000"/>
           </a:xfrm>
           <a:prstGeom prst="rect">
             <a:avLst/>
@@ -19711,8 +19711,8 @@
         </p:nvSpPr>
         <p:spPr>
           <a:xfrm>
-            <a:off x="4860000" y="1071000"/>
-            <a:ext cx="192000" cy="189000"/>
+            <a:off x="4872000" y="1287000"/>
+            <a:ext cx="200000" cy="225000"/>
           </a:xfrm>
           <a:prstGeom prst="rect">
             <a:avLst/>
@@ -19757,8 +19757,8 @@
         </p:nvSpPr>
         <p:spPr>
           <a:xfrm>
-            <a:off x="5051999" y="1071000"/>
-            <a:ext cx="192000" cy="189000"/>
+            <a:off x="5072000" y="1287000"/>
+            <a:ext cx="200000" cy="225000"/>
           </a:xfrm>
           <a:prstGeom prst="rect">
             <a:avLst/>
@@ -19803,8 +19803,8 @@
         </p:nvSpPr>
         <p:spPr>
           <a:xfrm>
-            <a:off x="5244000" y="1071000"/>
-            <a:ext cx="192000" cy="189000"/>
+            <a:off x="5272000" y="1287000"/>
+            <a:ext cx="200000" cy="225000"/>
           </a:xfrm>
           <a:prstGeom prst="rect">
             <a:avLst/>
@@ -19849,8 +19849,8 @@
         </p:nvSpPr>
         <p:spPr>
           <a:xfrm>
-            <a:off x="3707999" y="1260000"/>
-            <a:ext cx="192000" cy="189000"/>
+            <a:off x="3671999" y="1512000"/>
+            <a:ext cx="200000" cy="225000"/>
           </a:xfrm>
           <a:prstGeom prst="rect">
             <a:avLst/>
@@ -19895,8 +19895,8 @@
         </p:nvSpPr>
         <p:spPr>
           <a:xfrm>
-            <a:off x="3899999" y="1260000"/>
-            <a:ext cx="192000" cy="189000"/>
+            <a:off x="3871999" y="1512000"/>
+            <a:ext cx="200000" cy="225000"/>
           </a:xfrm>
           <a:prstGeom prst="rect">
             <a:avLst/>
@@ -19941,8 +19941,8 @@
         </p:nvSpPr>
         <p:spPr>
           <a:xfrm>
-            <a:off x="4091999" y="1260000"/>
-            <a:ext cx="192000" cy="189000"/>
+            <a:off x="4071999" y="1512000"/>
+            <a:ext cx="200000" cy="225000"/>
           </a:xfrm>
           <a:prstGeom prst="rect">
             <a:avLst/>
@@ -19987,8 +19987,8 @@
         </p:nvSpPr>
         <p:spPr>
           <a:xfrm>
-            <a:off x="4283999" y="1260000"/>
-            <a:ext cx="192000" cy="189000"/>
+            <a:off x="4271999" y="1512000"/>
+            <a:ext cx="200000" cy="225000"/>
           </a:xfrm>
           <a:prstGeom prst="rect">
             <a:avLst/>
@@ -20033,8 +20033,8 @@
         </p:nvSpPr>
         <p:spPr>
           <a:xfrm>
-            <a:off x="4475999" y="1260000"/>
-            <a:ext cx="192000" cy="189000"/>
+            <a:off x="4471999" y="1512000"/>
+            <a:ext cx="200000" cy="225000"/>
           </a:xfrm>
           <a:prstGeom prst="rect">
             <a:avLst/>
@@ -20079,8 +20079,8 @@
         </p:nvSpPr>
         <p:spPr>
           <a:xfrm>
-            <a:off x="4667999" y="1260000"/>
-            <a:ext cx="192000" cy="189000"/>
+            <a:off x="4672000" y="1512000"/>
+            <a:ext cx="200000" cy="225000"/>
           </a:xfrm>
           <a:prstGeom prst="rect">
             <a:avLst/>
@@ -20125,8 +20125,8 @@
         </p:nvSpPr>
         <p:spPr>
           <a:xfrm>
-            <a:off x="4860000" y="1260000"/>
-            <a:ext cx="192000" cy="189000"/>
+            <a:off x="4872000" y="1512000"/>
+            <a:ext cx="200000" cy="225000"/>
           </a:xfrm>
           <a:prstGeom prst="rect">
             <a:avLst/>
@@ -20171,8 +20171,8 @@
         </p:nvSpPr>
         <p:spPr>
           <a:xfrm>
-            <a:off x="5051999" y="1260000"/>
-            <a:ext cx="192000" cy="189000"/>
+            <a:off x="5072000" y="1512000"/>
+            <a:ext cx="200000" cy="225000"/>
           </a:xfrm>
           <a:prstGeom prst="rect">
             <a:avLst/>
@@ -20217,8 +20217,8 @@
         </p:nvSpPr>
         <p:spPr>
           <a:xfrm>
-            <a:off x="5244000" y="1260000"/>
-            <a:ext cx="192000" cy="189000"/>
+            <a:off x="5272000" y="1512000"/>
+            <a:ext cx="200000" cy="225000"/>
           </a:xfrm>
           <a:prstGeom prst="rect">
             <a:avLst/>
@@ -20263,8 +20263,8 @@
         </p:nvSpPr>
         <p:spPr>
           <a:xfrm>
-            <a:off x="3707999" y="1449000"/>
-            <a:ext cx="192000" cy="189000"/>
+            <a:off x="3671999" y="1737000"/>
+            <a:ext cx="200000" cy="225000"/>
           </a:xfrm>
           <a:prstGeom prst="rect">
             <a:avLst/>
@@ -20309,8 +20309,8 @@
         </p:nvSpPr>
         <p:spPr>
           <a:xfrm>
-            <a:off x="3899999" y="1449000"/>
-            <a:ext cx="192000" cy="189000"/>
+            <a:off x="3871999" y="1737000"/>
+            <a:ext cx="200000" cy="225000"/>
           </a:xfrm>
           <a:prstGeom prst="rect">
             <a:avLst/>
@@ -20355,8 +20355,8 @@
         </p:nvSpPr>
         <p:spPr>
           <a:xfrm>
-            <a:off x="4091999" y="1449000"/>
-            <a:ext cx="192000" cy="189000"/>
+            <a:off x="4071999" y="1737000"/>
+            <a:ext cx="200000" cy="225000"/>
           </a:xfrm>
           <a:prstGeom prst="rect">
             <a:avLst/>
@@ -20401,8 +20401,8 @@
         </p:nvSpPr>
         <p:spPr>
           <a:xfrm>
-            <a:off x="4283999" y="1449000"/>
-            <a:ext cx="192000" cy="189000"/>
+            <a:off x="4271999" y="1737000"/>
+            <a:ext cx="200000" cy="225000"/>
           </a:xfrm>
           <a:prstGeom prst="rect">
             <a:avLst/>
@@ -20447,8 +20447,8 @@
         </p:nvSpPr>
         <p:spPr>
           <a:xfrm>
-            <a:off x="4475999" y="1449000"/>
-            <a:ext cx="192000" cy="189000"/>
+            <a:off x="4471999" y="1737000"/>
+            <a:ext cx="200000" cy="225000"/>
           </a:xfrm>
           <a:prstGeom prst="rect">
             <a:avLst/>
@@ -20493,8 +20493,8 @@
         </p:nvSpPr>
         <p:spPr>
           <a:xfrm>
-            <a:off x="4667999" y="1449000"/>
-            <a:ext cx="192000" cy="189000"/>
+            <a:off x="4672000" y="1737000"/>
+            <a:ext cx="200000" cy="225000"/>
           </a:xfrm>
           <a:prstGeom prst="rect">
             <a:avLst/>
@@ -20539,8 +20539,8 @@
         </p:nvSpPr>
         <p:spPr>
           <a:xfrm>
-            <a:off x="4860000" y="1449000"/>
-            <a:ext cx="192000" cy="189000"/>
+            <a:off x="4872000" y="1737000"/>
+            <a:ext cx="200000" cy="225000"/>
           </a:xfrm>
           <a:prstGeom prst="rect">
             <a:avLst/>
@@ -20585,8 +20585,8 @@
         </p:nvSpPr>
         <p:spPr>
           <a:xfrm>
-            <a:off x="5051999" y="1449000"/>
-            <a:ext cx="192000" cy="189000"/>
+            <a:off x="5072000" y="1737000"/>
+            <a:ext cx="200000" cy="225000"/>
           </a:xfrm>
           <a:prstGeom prst="rect">
             <a:avLst/>
@@ -20631,8 +20631,8 @@
         </p:nvSpPr>
         <p:spPr>
           <a:xfrm>
-            <a:off x="5244000" y="1449000"/>
-            <a:ext cx="192000" cy="189000"/>
+            <a:off x="5272000" y="1737000"/>
+            <a:ext cx="200000" cy="225000"/>
           </a:xfrm>
           <a:prstGeom prst="rect">
             <a:avLst/>
@@ -20677,8 +20677,8 @@
         </p:nvSpPr>
         <p:spPr>
           <a:xfrm>
-            <a:off x="5561999" y="797400"/>
-            <a:ext cx="1440000" cy="251999"/>
+            <a:off x="5598000" y="936000"/>
+            <a:ext cx="1800000" cy="251999"/>
           </a:xfrm>
           <a:prstGeom prst="rect">
             <a:avLst/>
@@ -20712,8 +20712,8 @@
         </p:nvCxnSpPr>
         <p:spPr>
           <a:xfrm>
-            <a:off x="4572000" y="1638000"/>
-            <a:ext cx="0" cy="270000"/>
+            <a:off x="4572000" y="1962000"/>
+            <a:ext cx="0" cy="306000"/>
           </a:xfrm>
           <a:prstGeom prst="line">
             <a:avLst/>
@@ -20747,7 +20747,7 @@
         </p:nvCxnSpPr>
         <p:spPr>
           <a:xfrm>
-            <a:off x="1350000" y="1908000"/>
+            <a:off x="1350000" y="2268000"/>
             <a:ext cx="6425999" cy="0"/>
           </a:xfrm>
           <a:prstGeom prst="line">
@@ -20782,7 +20782,7 @@
         </p:nvCxnSpPr>
         <p:spPr>
           <a:xfrm>
-            <a:off x="1350000" y="1908000"/>
+            <a:off x="1350000" y="2268000"/>
             <a:ext cx="0" cy="154800"/>
           </a:xfrm>
           <a:prstGeom prst="line">
@@ -20818,8 +20818,8 @@
         </p:nvSpPr>
         <p:spPr>
           <a:xfrm>
-            <a:off x="342000" y="2070000"/>
-            <a:ext cx="2015999" cy="2951999"/>
+            <a:off x="342000" y="2430000"/>
+            <a:ext cx="2015999" cy="2591999"/>
           </a:xfrm>
           <a:prstGeom prst="roundRect">
             <a:avLst>
@@ -20866,7 +20866,7 @@
         </p:nvSpPr>
         <p:spPr>
           <a:xfrm>
-            <a:off x="450000" y="2124000"/>
+            <a:off x="450000" y="2484000"/>
             <a:ext cx="1800000" cy="270000"/>
           </a:xfrm>
           <a:prstGeom prst="rect">
@@ -20909,7 +20909,7 @@
         </p:blipFill>
         <p:spPr>
           <a:xfrm>
-            <a:off x="450000" y="2430000"/>
+            <a:off x="450000" y="2790000"/>
             <a:ext cx="1800000" cy="1800000"/>
           </a:xfrm>
           <a:prstGeom prst="rect">
@@ -20925,7 +20925,7 @@
         </p:nvSpPr>
         <p:spPr>
           <a:xfrm>
-            <a:off x="413999" y="4302000"/>
+            <a:off x="413999" y="4662000"/>
             <a:ext cx="1871999" cy="251999"/>
           </a:xfrm>
           <a:prstGeom prst="rect">
@@ -20960,7 +20960,7 @@
         </p:nvCxnSpPr>
         <p:spPr>
           <a:xfrm>
-            <a:off x="3491999" y="1908000"/>
+            <a:off x="3491999" y="2268000"/>
             <a:ext cx="0" cy="154800"/>
           </a:xfrm>
           <a:prstGeom prst="line">
@@ -20996,8 +20996,8 @@
         </p:nvSpPr>
         <p:spPr>
           <a:xfrm>
-            <a:off x="2484000" y="2070000"/>
-            <a:ext cx="2015999" cy="2951999"/>
+            <a:off x="2484000" y="2430000"/>
+            <a:ext cx="2015999" cy="2591999"/>
           </a:xfrm>
           <a:prstGeom prst="roundRect">
             <a:avLst>
@@ -21044,7 +21044,7 @@
         </p:nvSpPr>
         <p:spPr>
           <a:xfrm>
-            <a:off x="2591999" y="2124000"/>
+            <a:off x="2591999" y="2484000"/>
             <a:ext cx="1800000" cy="270000"/>
           </a:xfrm>
           <a:prstGeom prst="rect">
@@ -21087,7 +21087,7 @@
         </p:blipFill>
         <p:spPr>
           <a:xfrm>
-            <a:off x="2591999" y="2430000"/>
+            <a:off x="2591999" y="2790000"/>
             <a:ext cx="1800000" cy="1800000"/>
           </a:xfrm>
           <a:prstGeom prst="rect">
@@ -21103,7 +21103,7 @@
         </p:nvSpPr>
         <p:spPr>
           <a:xfrm>
-            <a:off x="2556000" y="4302000"/>
+            <a:off x="2556000" y="4662000"/>
             <a:ext cx="1871999" cy="251999"/>
           </a:xfrm>
           <a:prstGeom prst="rect">
@@ -21138,7 +21138,7 @@
         </p:nvCxnSpPr>
         <p:spPr>
           <a:xfrm>
-            <a:off x="5633999" y="1908000"/>
+            <a:off x="5633999" y="2268000"/>
             <a:ext cx="0" cy="154800"/>
           </a:xfrm>
           <a:prstGeom prst="line">
@@ -21174,8 +21174,8 @@
         </p:nvSpPr>
         <p:spPr>
           <a:xfrm>
-            <a:off x="4625999" y="2070000"/>
-            <a:ext cx="2015999" cy="2951999"/>
+            <a:off x="4625999" y="2430000"/>
+            <a:ext cx="2015999" cy="2591999"/>
           </a:xfrm>
           <a:prstGeom prst="roundRect">
             <a:avLst>
@@ -21222,7 +21222,7 @@
         </p:nvSpPr>
         <p:spPr>
           <a:xfrm>
-            <a:off x="4733999" y="2124000"/>
+            <a:off x="4733999" y="2484000"/>
             <a:ext cx="1800000" cy="270000"/>
           </a:xfrm>
           <a:prstGeom prst="rect">
@@ -21265,7 +21265,7 @@
         </p:blipFill>
         <p:spPr>
           <a:xfrm>
-            <a:off x="4733999" y="2430000"/>
+            <a:off x="4733999" y="2790000"/>
             <a:ext cx="1800000" cy="1800000"/>
           </a:xfrm>
           <a:prstGeom prst="rect">
@@ -21281,7 +21281,7 @@
         </p:nvSpPr>
         <p:spPr>
           <a:xfrm>
-            <a:off x="4697999" y="4302000"/>
+            <a:off x="4697999" y="4662000"/>
             <a:ext cx="1871999" cy="251999"/>
           </a:xfrm>
           <a:prstGeom prst="rect">
@@ -21316,7 +21316,7 @@
         </p:nvCxnSpPr>
         <p:spPr>
           <a:xfrm>
-            <a:off x="7775999" y="1908000"/>
+            <a:off x="7775999" y="2268000"/>
             <a:ext cx="0" cy="154800"/>
           </a:xfrm>
           <a:prstGeom prst="line">
@@ -21352,8 +21352,8 @@
         </p:nvSpPr>
         <p:spPr>
           <a:xfrm>
-            <a:off x="6767999" y="2070000"/>
-            <a:ext cx="2015999" cy="2951999"/>
+            <a:off x="6767999" y="2430000"/>
+            <a:ext cx="2015999" cy="2591999"/>
           </a:xfrm>
           <a:prstGeom prst="roundRect">
             <a:avLst>
@@ -21400,7 +21400,7 @@
         </p:nvSpPr>
         <p:spPr>
           <a:xfrm>
-            <a:off x="6875999" y="2124000"/>
+            <a:off x="6875999" y="2484000"/>
             <a:ext cx="1800000" cy="270000"/>
           </a:xfrm>
           <a:prstGeom prst="rect">
@@ -21443,7 +21443,7 @@
         </p:blipFill>
         <p:spPr>
           <a:xfrm>
-            <a:off x="6875999" y="2430000"/>
+            <a:off x="6875999" y="2790000"/>
             <a:ext cx="1800000" cy="1800000"/>
           </a:xfrm>
           <a:prstGeom prst="rect">
@@ -21459,7 +21459,7 @@
         </p:nvSpPr>
         <p:spPr>
           <a:xfrm>
-            <a:off x="6839999" y="4302000"/>
+            <a:off x="6839999" y="4662000"/>
             <a:ext cx="1871999" cy="251999"/>
           </a:xfrm>
           <a:prstGeom prst="rect">
@@ -21494,8 +21494,8 @@
         </p:nvSpPr>
         <p:spPr>
           <a:xfrm>
-            <a:off x="288000" y="1925999"/>
-            <a:ext cx="2124000" cy="3167999"/>
+            <a:off x="288000" y="2286000"/>
+            <a:ext cx="2124000" cy="2808000"/>
           </a:xfrm>
           <a:prstGeom prst="rect">
             <a:avLst/>
@@ -21540,8 +21540,8 @@
         </p:nvSpPr>
         <p:spPr>
           <a:xfrm>
-            <a:off x="2429999" y="1925999"/>
-            <a:ext cx="2124000" cy="3167999"/>
+            <a:off x="2429999" y="2286000"/>
+            <a:ext cx="2124000" cy="2808000"/>
           </a:xfrm>
           <a:prstGeom prst="rect">
             <a:avLst/>
@@ -21586,8 +21586,8 @@
         </p:nvSpPr>
         <p:spPr>
           <a:xfrm>
-            <a:off x="6713999" y="1925999"/>
-            <a:ext cx="2124000" cy="3167999"/>
+            <a:off x="6713999" y="2286000"/>
+            <a:ext cx="2124000" cy="2808000"/>
           </a:xfrm>
           <a:prstGeom prst="rect">
             <a:avLst/>
@@ -21658,8 +21658,8 @@
         </p:blipFill>
         <p:spPr>
           <a:xfrm>
-            <a:off x="792000" y="198000"/>
-            <a:ext cx="1224000" cy="658800"/>
+            <a:off x="684000" y="270000"/>
+            <a:ext cx="1332000" cy="716400"/>
           </a:xfrm>
           <a:prstGeom prst="rect">
             <a:avLst/>
@@ -21682,8 +21682,8 @@
         </p:blipFill>
         <p:spPr>
           <a:xfrm>
-            <a:off x="792000" y="990000"/>
-            <a:ext cx="1224000" cy="658800"/>
+            <a:off x="684000" y="1242000"/>
+            <a:ext cx="1332000" cy="716400"/>
           </a:xfrm>
           <a:prstGeom prst="rect">
             <a:avLst/>
@@ -21698,8 +21698,8 @@
         </p:nvSpPr>
         <p:spPr>
           <a:xfrm>
-            <a:off x="72000" y="419400"/>
-            <a:ext cx="648000" cy="216000"/>
+            <a:off x="17999" y="520200"/>
+            <a:ext cx="612000" cy="216000"/>
           </a:xfrm>
           <a:prstGeom prst="rect">
             <a:avLst/>
@@ -21733,8 +21733,8 @@
         </p:nvSpPr>
         <p:spPr>
           <a:xfrm>
-            <a:off x="72000" y="1211400"/>
-            <a:ext cx="648000" cy="216000"/>
+            <a:off x="17999" y="1492200"/>
+            <a:ext cx="612000" cy="216000"/>
           </a:xfrm>
           <a:prstGeom prst="rect">
             <a:avLst/>
@@ -21768,7 +21768,7 @@
         </p:nvCxnSpPr>
         <p:spPr>
           <a:xfrm>
-            <a:off x="2015999" y="527400"/>
+            <a:off x="2015999" y="628200"/>
             <a:ext cx="216000" cy="0"/>
           </a:xfrm>
           <a:prstGeom prst="line">
@@ -21803,7 +21803,7 @@
         </p:nvCxnSpPr>
         <p:spPr>
           <a:xfrm>
-            <a:off x="2015999" y="1319400"/>
+            <a:off x="2015999" y="1600200"/>
             <a:ext cx="216000" cy="0"/>
           </a:xfrm>
           <a:prstGeom prst="line">
@@ -21838,8 +21838,8 @@
         </p:nvCxnSpPr>
         <p:spPr>
           <a:xfrm>
-            <a:off x="2231999" y="527400"/>
-            <a:ext cx="0" cy="792000"/>
+            <a:off x="2231999" y="628200"/>
+            <a:ext cx="0" cy="972000"/>
           </a:xfrm>
           <a:prstGeom prst="line">
             <a:avLst/>
@@ -21873,8 +21873,8 @@
         </p:nvCxnSpPr>
         <p:spPr>
           <a:xfrm>
-            <a:off x="2231999" y="923400"/>
-            <a:ext cx="288001" cy="0"/>
+            <a:off x="2231999" y="1114200"/>
+            <a:ext cx="144001" cy="0"/>
           </a:xfrm>
           <a:prstGeom prst="line">
             <a:avLst/>
@@ -21909,8 +21909,8 @@
         </p:nvSpPr>
         <p:spPr>
           <a:xfrm>
-            <a:off x="2520000" y="563400"/>
-            <a:ext cx="1080000" cy="720000"/>
+            <a:off x="2376000" y="700200"/>
+            <a:ext cx="1080000" cy="827999"/>
           </a:xfrm>
           <a:prstGeom prst="roundRect">
             <a:avLst>
@@ -21966,7 +21966,7 @@
         </p:nvSpPr>
         <p:spPr>
           <a:xfrm>
-            <a:off x="2340000" y="1326600"/>
+            <a:off x="2196000" y="1571400"/>
             <a:ext cx="1440000" cy="198000"/>
           </a:xfrm>
           <a:prstGeom prst="rect">
@@ -22001,8 +22001,8 @@
         </p:nvCxnSpPr>
         <p:spPr>
           <a:xfrm>
-            <a:off x="3600000" y="923400"/>
-            <a:ext cx="97200" cy="0"/>
+            <a:off x="3456000" y="1114200"/>
+            <a:ext cx="205200" cy="0"/>
           </a:xfrm>
           <a:prstGeom prst="line">
             <a:avLst/>
@@ -22037,8 +22037,8 @@
         </p:nvSpPr>
         <p:spPr>
           <a:xfrm>
-            <a:off x="3707999" y="125999"/>
-            <a:ext cx="192000" cy="189000"/>
+            <a:off x="3671999" y="162000"/>
+            <a:ext cx="200000" cy="225000"/>
           </a:xfrm>
           <a:prstGeom prst="rect">
             <a:avLst/>
@@ -22083,8 +22083,8 @@
         </p:nvSpPr>
         <p:spPr>
           <a:xfrm>
-            <a:off x="3899999" y="125999"/>
-            <a:ext cx="192000" cy="189000"/>
+            <a:off x="3871999" y="162000"/>
+            <a:ext cx="200000" cy="225000"/>
           </a:xfrm>
           <a:prstGeom prst="rect">
             <a:avLst/>
@@ -22129,8 +22129,8 @@
         </p:nvSpPr>
         <p:spPr>
           <a:xfrm>
-            <a:off x="4091999" y="125999"/>
-            <a:ext cx="192000" cy="189000"/>
+            <a:off x="4071999" y="162000"/>
+            <a:ext cx="200000" cy="225000"/>
           </a:xfrm>
           <a:prstGeom prst="rect">
             <a:avLst/>
@@ -22175,8 +22175,8 @@
         </p:nvSpPr>
         <p:spPr>
           <a:xfrm>
-            <a:off x="4283999" y="125999"/>
-            <a:ext cx="192000" cy="189000"/>
+            <a:off x="4271999" y="162000"/>
+            <a:ext cx="200000" cy="225000"/>
           </a:xfrm>
           <a:prstGeom prst="rect">
             <a:avLst/>
@@ -22221,8 +22221,8 @@
         </p:nvSpPr>
         <p:spPr>
           <a:xfrm>
-            <a:off x="4475999" y="125999"/>
-            <a:ext cx="192000" cy="189000"/>
+            <a:off x="4471999" y="162000"/>
+            <a:ext cx="200000" cy="225000"/>
           </a:xfrm>
           <a:prstGeom prst="rect">
             <a:avLst/>
@@ -22267,8 +22267,8 @@
         </p:nvSpPr>
         <p:spPr>
           <a:xfrm>
-            <a:off x="4667999" y="125999"/>
-            <a:ext cx="192000" cy="189000"/>
+            <a:off x="4672000" y="162000"/>
+            <a:ext cx="200000" cy="225000"/>
           </a:xfrm>
           <a:prstGeom prst="rect">
             <a:avLst/>
@@ -22313,8 +22313,8 @@
         </p:nvSpPr>
         <p:spPr>
           <a:xfrm>
-            <a:off x="4860000" y="125999"/>
-            <a:ext cx="192000" cy="189000"/>
+            <a:off x="4872000" y="162000"/>
+            <a:ext cx="200000" cy="225000"/>
           </a:xfrm>
           <a:prstGeom prst="rect">
             <a:avLst/>
@@ -22359,8 +22359,8 @@
         </p:nvSpPr>
         <p:spPr>
           <a:xfrm>
-            <a:off x="5051999" y="125999"/>
-            <a:ext cx="192000" cy="189000"/>
+            <a:off x="5072000" y="162000"/>
+            <a:ext cx="200000" cy="225000"/>
           </a:xfrm>
           <a:prstGeom prst="rect">
             <a:avLst/>
@@ -22405,8 +22405,8 @@
         </p:nvSpPr>
         <p:spPr>
           <a:xfrm>
-            <a:off x="5244000" y="125999"/>
-            <a:ext cx="192000" cy="189000"/>
+            <a:off x="5272000" y="162000"/>
+            <a:ext cx="200000" cy="225000"/>
           </a:xfrm>
           <a:prstGeom prst="rect">
             <a:avLst/>
@@ -22451,8 +22451,8 @@
         </p:nvSpPr>
         <p:spPr>
           <a:xfrm>
-            <a:off x="3707999" y="315000"/>
-            <a:ext cx="192000" cy="189000"/>
+            <a:off x="3671999" y="387000"/>
+            <a:ext cx="200000" cy="225000"/>
           </a:xfrm>
           <a:prstGeom prst="rect">
             <a:avLst/>
@@ -22497,8 +22497,8 @@
         </p:nvSpPr>
         <p:spPr>
           <a:xfrm>
-            <a:off x="3899999" y="315000"/>
-            <a:ext cx="192000" cy="189000"/>
+            <a:off x="3871999" y="387000"/>
+            <a:ext cx="200000" cy="225000"/>
           </a:xfrm>
           <a:prstGeom prst="rect">
             <a:avLst/>
@@ -22543,8 +22543,8 @@
         </p:nvSpPr>
         <p:spPr>
           <a:xfrm>
-            <a:off x="4091999" y="315000"/>
-            <a:ext cx="192000" cy="189000"/>
+            <a:off x="4071999" y="387000"/>
+            <a:ext cx="200000" cy="225000"/>
           </a:xfrm>
           <a:prstGeom prst="rect">
             <a:avLst/>
@@ -22589,8 +22589,8 @@
         </p:nvSpPr>
         <p:spPr>
           <a:xfrm>
-            <a:off x="4283999" y="315000"/>
-            <a:ext cx="192000" cy="189000"/>
+            <a:off x="4271999" y="387000"/>
+            <a:ext cx="200000" cy="225000"/>
           </a:xfrm>
           <a:prstGeom prst="rect">
             <a:avLst/>
@@ -22635,8 +22635,8 @@
         </p:nvSpPr>
         <p:spPr>
           <a:xfrm>
-            <a:off x="4475999" y="315000"/>
-            <a:ext cx="192000" cy="189000"/>
+            <a:off x="4471999" y="387000"/>
+            <a:ext cx="200000" cy="225000"/>
           </a:xfrm>
           <a:prstGeom prst="rect">
             <a:avLst/>
@@ -22681,8 +22681,8 @@
         </p:nvSpPr>
         <p:spPr>
           <a:xfrm>
-            <a:off x="4667999" y="315000"/>
-            <a:ext cx="192000" cy="189000"/>
+            <a:off x="4672000" y="387000"/>
+            <a:ext cx="200000" cy="225000"/>
           </a:xfrm>
           <a:prstGeom prst="rect">
             <a:avLst/>
@@ -22727,8 +22727,8 @@
         </p:nvSpPr>
         <p:spPr>
           <a:xfrm>
-            <a:off x="4860000" y="315000"/>
-            <a:ext cx="192000" cy="189000"/>
+            <a:off x="4872000" y="387000"/>
+            <a:ext cx="200000" cy="225000"/>
           </a:xfrm>
           <a:prstGeom prst="rect">
             <a:avLst/>
@@ -22773,8 +22773,8 @@
         </p:nvSpPr>
         <p:spPr>
           <a:xfrm>
-            <a:off x="5051999" y="315000"/>
-            <a:ext cx="192000" cy="189000"/>
+            <a:off x="5072000" y="387000"/>
+            <a:ext cx="200000" cy="225000"/>
           </a:xfrm>
           <a:prstGeom prst="rect">
             <a:avLst/>
@@ -22819,8 +22819,8 @@
         </p:nvSpPr>
         <p:spPr>
           <a:xfrm>
-            <a:off x="5244000" y="315000"/>
-            <a:ext cx="192000" cy="189000"/>
+            <a:off x="5272000" y="387000"/>
+            <a:ext cx="200000" cy="225000"/>
           </a:xfrm>
           <a:prstGeom prst="rect">
             <a:avLst/>
@@ -22865,8 +22865,8 @@
         </p:nvSpPr>
         <p:spPr>
           <a:xfrm>
-            <a:off x="3707999" y="503999"/>
-            <a:ext cx="192000" cy="189000"/>
+            <a:off x="3671999" y="612000"/>
+            <a:ext cx="200000" cy="225000"/>
           </a:xfrm>
           <a:prstGeom prst="rect">
             <a:avLst/>
@@ -22911,8 +22911,8 @@
         </p:nvSpPr>
         <p:spPr>
           <a:xfrm>
-            <a:off x="3899999" y="503999"/>
-            <a:ext cx="192000" cy="189000"/>
+            <a:off x="3871999" y="612000"/>
+            <a:ext cx="200000" cy="225000"/>
           </a:xfrm>
           <a:prstGeom prst="rect">
             <a:avLst/>
@@ -22957,8 +22957,8 @@
         </p:nvSpPr>
         <p:spPr>
           <a:xfrm>
-            <a:off x="4091999" y="503999"/>
-            <a:ext cx="192000" cy="189000"/>
+            <a:off x="4071999" y="612000"/>
+            <a:ext cx="200000" cy="225000"/>
           </a:xfrm>
           <a:prstGeom prst="rect">
             <a:avLst/>
@@ -23003,8 +23003,8 @@
         </p:nvSpPr>
         <p:spPr>
           <a:xfrm>
-            <a:off x="4283999" y="503999"/>
-            <a:ext cx="192000" cy="189000"/>
+            <a:off x="4271999" y="612000"/>
+            <a:ext cx="200000" cy="225000"/>
           </a:xfrm>
           <a:prstGeom prst="rect">
             <a:avLst/>
@@ -23049,8 +23049,8 @@
         </p:nvSpPr>
         <p:spPr>
           <a:xfrm>
-            <a:off x="4475999" y="503999"/>
-            <a:ext cx="192000" cy="189000"/>
+            <a:off x="4471999" y="612000"/>
+            <a:ext cx="200000" cy="225000"/>
           </a:xfrm>
           <a:prstGeom prst="rect">
             <a:avLst/>
@@ -23095,8 +23095,8 @@
         </p:nvSpPr>
         <p:spPr>
           <a:xfrm>
-            <a:off x="4667999" y="503999"/>
-            <a:ext cx="192000" cy="189000"/>
+            <a:off x="4672000" y="612000"/>
+            <a:ext cx="200000" cy="225000"/>
           </a:xfrm>
           <a:prstGeom prst="rect">
             <a:avLst/>
@@ -23141,8 +23141,8 @@
         </p:nvSpPr>
         <p:spPr>
           <a:xfrm>
-            <a:off x="4860000" y="503999"/>
-            <a:ext cx="192000" cy="189000"/>
+            <a:off x="4872000" y="612000"/>
+            <a:ext cx="200000" cy="225000"/>
           </a:xfrm>
           <a:prstGeom prst="rect">
             <a:avLst/>
@@ -23187,8 +23187,8 @@
         </p:nvSpPr>
         <p:spPr>
           <a:xfrm>
-            <a:off x="5051999" y="503999"/>
-            <a:ext cx="192000" cy="189000"/>
+            <a:off x="5072000" y="612000"/>
+            <a:ext cx="200000" cy="225000"/>
           </a:xfrm>
           <a:prstGeom prst="rect">
             <a:avLst/>
@@ -23233,8 +23233,8 @@
         </p:nvSpPr>
         <p:spPr>
           <a:xfrm>
-            <a:off x="5244000" y="503999"/>
-            <a:ext cx="192000" cy="189000"/>
+            <a:off x="5272000" y="612000"/>
+            <a:ext cx="200000" cy="225000"/>
           </a:xfrm>
           <a:prstGeom prst="rect">
             <a:avLst/>
@@ -23279,8 +23279,8 @@
         </p:nvSpPr>
         <p:spPr>
           <a:xfrm>
-            <a:off x="3707999" y="693000"/>
-            <a:ext cx="192000" cy="189000"/>
+            <a:off x="3671999" y="837000"/>
+            <a:ext cx="200000" cy="225000"/>
           </a:xfrm>
           <a:prstGeom prst="rect">
             <a:avLst/>
@@ -23325,8 +23325,8 @@
         </p:nvSpPr>
         <p:spPr>
           <a:xfrm>
-            <a:off x="3899999" y="693000"/>
-            <a:ext cx="192000" cy="189000"/>
+            <a:off x="3871999" y="837000"/>
+            <a:ext cx="200000" cy="225000"/>
           </a:xfrm>
           <a:prstGeom prst="rect">
             <a:avLst/>
@@ -23371,8 +23371,8 @@
         </p:nvSpPr>
         <p:spPr>
           <a:xfrm>
-            <a:off x="4091999" y="693000"/>
-            <a:ext cx="192000" cy="189000"/>
+            <a:off x="4071999" y="837000"/>
+            <a:ext cx="200000" cy="225000"/>
           </a:xfrm>
           <a:prstGeom prst="rect">
             <a:avLst/>
@@ -23417,8 +23417,8 @@
         </p:nvSpPr>
         <p:spPr>
           <a:xfrm>
-            <a:off x="4283999" y="693000"/>
-            <a:ext cx="192000" cy="189000"/>
+            <a:off x="4271999" y="837000"/>
+            <a:ext cx="200000" cy="225000"/>
           </a:xfrm>
           <a:prstGeom prst="rect">
             <a:avLst/>
@@ -23463,8 +23463,8 @@
         </p:nvSpPr>
         <p:spPr>
           <a:xfrm>
-            <a:off x="4475999" y="693000"/>
-            <a:ext cx="192000" cy="189000"/>
+            <a:off x="4471999" y="837000"/>
+            <a:ext cx="200000" cy="225000"/>
           </a:xfrm>
           <a:prstGeom prst="rect">
             <a:avLst/>
@@ -23509,8 +23509,8 @@
         </p:nvSpPr>
         <p:spPr>
           <a:xfrm>
-            <a:off x="4667999" y="693000"/>
-            <a:ext cx="192000" cy="189000"/>
+            <a:off x="4672000" y="837000"/>
+            <a:ext cx="200000" cy="225000"/>
           </a:xfrm>
           <a:prstGeom prst="rect">
             <a:avLst/>
@@ -23555,8 +23555,8 @@
         </p:nvSpPr>
         <p:spPr>
           <a:xfrm>
-            <a:off x="4860000" y="693000"/>
-            <a:ext cx="192000" cy="189000"/>
+            <a:off x="4872000" y="837000"/>
+            <a:ext cx="200000" cy="225000"/>
           </a:xfrm>
           <a:prstGeom prst="rect">
             <a:avLst/>
@@ -23601,8 +23601,8 @@
         </p:nvSpPr>
         <p:spPr>
           <a:xfrm>
-            <a:off x="5051999" y="693000"/>
-            <a:ext cx="192000" cy="189000"/>
+            <a:off x="5072000" y="837000"/>
+            <a:ext cx="200000" cy="225000"/>
           </a:xfrm>
           <a:prstGeom prst="rect">
             <a:avLst/>
@@ -23647,8 +23647,8 @@
         </p:nvSpPr>
         <p:spPr>
           <a:xfrm>
-            <a:off x="5244000" y="693000"/>
-            <a:ext cx="192000" cy="189000"/>
+            <a:off x="5272000" y="837000"/>
+            <a:ext cx="200000" cy="225000"/>
           </a:xfrm>
           <a:prstGeom prst="rect">
             <a:avLst/>
@@ -23693,8 +23693,8 @@
         </p:nvSpPr>
         <p:spPr>
           <a:xfrm>
-            <a:off x="3707999" y="882000"/>
-            <a:ext cx="192000" cy="189000"/>
+            <a:off x="3671999" y="1062000"/>
+            <a:ext cx="200000" cy="225000"/>
           </a:xfrm>
           <a:prstGeom prst="rect">
             <a:avLst/>
@@ -23739,8 +23739,8 @@
         </p:nvSpPr>
         <p:spPr>
           <a:xfrm>
-            <a:off x="3899999" y="882000"/>
-            <a:ext cx="192000" cy="189000"/>
+            <a:off x="3871999" y="1062000"/>
+            <a:ext cx="200000" cy="225000"/>
           </a:xfrm>
           <a:prstGeom prst="rect">
             <a:avLst/>
@@ -23785,8 +23785,8 @@
         </p:nvSpPr>
         <p:spPr>
           <a:xfrm>
-            <a:off x="4091999" y="882000"/>
-            <a:ext cx="192000" cy="189000"/>
+            <a:off x="4071999" y="1062000"/>
+            <a:ext cx="200000" cy="225000"/>
           </a:xfrm>
           <a:prstGeom prst="rect">
             <a:avLst/>
@@ -23831,8 +23831,8 @@
         </p:nvSpPr>
         <p:spPr>
           <a:xfrm>
-            <a:off x="4283999" y="882000"/>
-            <a:ext cx="192000" cy="189000"/>
+            <a:off x="4271999" y="1062000"/>
+            <a:ext cx="200000" cy="225000"/>
           </a:xfrm>
           <a:prstGeom prst="rect">
             <a:avLst/>
@@ -23877,8 +23877,8 @@
         </p:nvSpPr>
         <p:spPr>
           <a:xfrm>
-            <a:off x="4475999" y="882000"/>
-            <a:ext cx="192000" cy="189000"/>
+            <a:off x="4471999" y="1062000"/>
+            <a:ext cx="200000" cy="225000"/>
           </a:xfrm>
           <a:prstGeom prst="rect">
             <a:avLst/>
@@ -23923,8 +23923,8 @@
         </p:nvSpPr>
         <p:spPr>
           <a:xfrm>
-            <a:off x="4667999" y="882000"/>
-            <a:ext cx="192000" cy="189000"/>
+            <a:off x="4672000" y="1062000"/>
+            <a:ext cx="200000" cy="225000"/>
           </a:xfrm>
           <a:prstGeom prst="rect">
             <a:avLst/>
@@ -23969,8 +23969,8 @@
         </p:nvSpPr>
         <p:spPr>
           <a:xfrm>
-            <a:off x="4860000" y="882000"/>
-            <a:ext cx="192000" cy="189000"/>
+            <a:off x="4872000" y="1062000"/>
+            <a:ext cx="200000" cy="225000"/>
           </a:xfrm>
           <a:prstGeom prst="rect">
             <a:avLst/>
@@ -24015,8 +24015,8 @@
         </p:nvSpPr>
         <p:spPr>
           <a:xfrm>
-            <a:off x="5051999" y="882000"/>
-            <a:ext cx="192000" cy="189000"/>
+            <a:off x="5072000" y="1062000"/>
+            <a:ext cx="200000" cy="225000"/>
           </a:xfrm>
           <a:prstGeom prst="rect">
             <a:avLst/>
@@ -24061,8 +24061,8 @@
         </p:nvSpPr>
         <p:spPr>
           <a:xfrm>
-            <a:off x="5244000" y="882000"/>
-            <a:ext cx="192000" cy="189000"/>
+            <a:off x="5272000" y="1062000"/>
+            <a:ext cx="200000" cy="225000"/>
           </a:xfrm>
           <a:prstGeom prst="rect">
             <a:avLst/>
@@ -24107,8 +24107,8 @@
         </p:nvSpPr>
         <p:spPr>
           <a:xfrm>
-            <a:off x="3707999" y="1071000"/>
-            <a:ext cx="192000" cy="189000"/>
+            <a:off x="3671999" y="1287000"/>
+            <a:ext cx="200000" cy="225000"/>
           </a:xfrm>
           <a:prstGeom prst="rect">
             <a:avLst/>
@@ -24153,8 +24153,8 @@
         </p:nvSpPr>
         <p:spPr>
           <a:xfrm>
-            <a:off x="3899999" y="1071000"/>
-            <a:ext cx="192000" cy="189000"/>
+            <a:off x="3871999" y="1287000"/>
+            <a:ext cx="200000" cy="225000"/>
           </a:xfrm>
           <a:prstGeom prst="rect">
             <a:avLst/>
@@ -24199,8 +24199,8 @@
         </p:nvSpPr>
         <p:spPr>
           <a:xfrm>
-            <a:off x="4091999" y="1071000"/>
-            <a:ext cx="192000" cy="189000"/>
+            <a:off x="4071999" y="1287000"/>
+            <a:ext cx="200000" cy="225000"/>
           </a:xfrm>
           <a:prstGeom prst="rect">
             <a:avLst/>
@@ -24245,8 +24245,8 @@
         </p:nvSpPr>
         <p:spPr>
           <a:xfrm>
-            <a:off x="4283999" y="1071000"/>
-            <a:ext cx="192000" cy="189000"/>
+            <a:off x="4271999" y="1287000"/>
+            <a:ext cx="200000" cy="225000"/>
           </a:xfrm>
           <a:prstGeom prst="rect">
             <a:avLst/>
@@ -24291,8 +24291,8 @@
         </p:nvSpPr>
         <p:spPr>
           <a:xfrm>
-            <a:off x="4475999" y="1071000"/>
-            <a:ext cx="192000" cy="189000"/>
+            <a:off x="4471999" y="1287000"/>
+            <a:ext cx="200000" cy="225000"/>
           </a:xfrm>
           <a:prstGeom prst="rect">
             <a:avLst/>
@@ -24337,8 +24337,8 @@
         </p:nvSpPr>
         <p:spPr>
           <a:xfrm>
-            <a:off x="4667999" y="1071000"/>
-            <a:ext cx="192000" cy="189000"/>
+            <a:off x="4672000" y="1287000"/>
+            <a:ext cx="200000" cy="225000"/>
           </a:xfrm>
           <a:prstGeom prst="rect">
             <a:avLst/>
@@ -24383,8 +24383,8 @@
         </p:nvSpPr>
         <p:spPr>
           <a:xfrm>
-            <a:off x="4860000" y="1071000"/>
-            <a:ext cx="192000" cy="189000"/>
+            <a:off x="4872000" y="1287000"/>
+            <a:ext cx="200000" cy="225000"/>
           </a:xfrm>
           <a:prstGeom prst="rect">
             <a:avLst/>
@@ -24429,8 +24429,8 @@
         </p:nvSpPr>
         <p:spPr>
           <a:xfrm>
-            <a:off x="5051999" y="1071000"/>
-            <a:ext cx="192000" cy="189000"/>
+            <a:off x="5072000" y="1287000"/>
+            <a:ext cx="200000" cy="225000"/>
           </a:xfrm>
           <a:prstGeom prst="rect">
             <a:avLst/>
@@ -24475,8 +24475,8 @@
         </p:nvSpPr>
         <p:spPr>
           <a:xfrm>
-            <a:off x="5244000" y="1071000"/>
-            <a:ext cx="192000" cy="189000"/>
+            <a:off x="5272000" y="1287000"/>
+            <a:ext cx="200000" cy="225000"/>
           </a:xfrm>
           <a:prstGeom prst="rect">
             <a:avLst/>
@@ -24521,8 +24521,8 @@
         </p:nvSpPr>
         <p:spPr>
           <a:xfrm>
-            <a:off x="3707999" y="1260000"/>
-            <a:ext cx="192000" cy="189000"/>
+            <a:off x="3671999" y="1512000"/>
+            <a:ext cx="200000" cy="225000"/>
           </a:xfrm>
           <a:prstGeom prst="rect">
             <a:avLst/>
@@ -24567,8 +24567,8 @@
         </p:nvSpPr>
         <p:spPr>
           <a:xfrm>
-            <a:off x="3899999" y="1260000"/>
-            <a:ext cx="192000" cy="189000"/>
+            <a:off x="3871999" y="1512000"/>
+            <a:ext cx="200000" cy="225000"/>
           </a:xfrm>
           <a:prstGeom prst="rect">
             <a:avLst/>
@@ -24613,8 +24613,8 @@
         </p:nvSpPr>
         <p:spPr>
           <a:xfrm>
-            <a:off x="4091999" y="1260000"/>
-            <a:ext cx="192000" cy="189000"/>
+            <a:off x="4071999" y="1512000"/>
+            <a:ext cx="200000" cy="225000"/>
           </a:xfrm>
           <a:prstGeom prst="rect">
             <a:avLst/>
@@ -24659,8 +24659,8 @@
         </p:nvSpPr>
         <p:spPr>
           <a:xfrm>
-            <a:off x="4283999" y="1260000"/>
-            <a:ext cx="192000" cy="189000"/>
+            <a:off x="4271999" y="1512000"/>
+            <a:ext cx="200000" cy="225000"/>
           </a:xfrm>
           <a:prstGeom prst="rect">
             <a:avLst/>
@@ -24705,8 +24705,8 @@
         </p:nvSpPr>
         <p:spPr>
           <a:xfrm>
-            <a:off x="4475999" y="1260000"/>
-            <a:ext cx="192000" cy="189000"/>
+            <a:off x="4471999" y="1512000"/>
+            <a:ext cx="200000" cy="225000"/>
           </a:xfrm>
           <a:prstGeom prst="rect">
             <a:avLst/>
@@ -24751,8 +24751,8 @@
         </p:nvSpPr>
         <p:spPr>
           <a:xfrm>
-            <a:off x="4667999" y="1260000"/>
-            <a:ext cx="192000" cy="189000"/>
+            <a:off x="4672000" y="1512000"/>
+            <a:ext cx="200000" cy="225000"/>
           </a:xfrm>
           <a:prstGeom prst="rect">
             <a:avLst/>
@@ -24797,8 +24797,8 @@
         </p:nvSpPr>
         <p:spPr>
           <a:xfrm>
-            <a:off x="4860000" y="1260000"/>
-            <a:ext cx="192000" cy="189000"/>
+            <a:off x="4872000" y="1512000"/>
+            <a:ext cx="200000" cy="225000"/>
           </a:xfrm>
           <a:prstGeom prst="rect">
             <a:avLst/>
@@ -24843,8 +24843,8 @@
         </p:nvSpPr>
         <p:spPr>
           <a:xfrm>
-            <a:off x="5051999" y="1260000"/>
-            <a:ext cx="192000" cy="189000"/>
+            <a:off x="5072000" y="1512000"/>
+            <a:ext cx="200000" cy="225000"/>
           </a:xfrm>
           <a:prstGeom prst="rect">
             <a:avLst/>
@@ -24889,8 +24889,8 @@
         </p:nvSpPr>
         <p:spPr>
           <a:xfrm>
-            <a:off x="5244000" y="1260000"/>
-            <a:ext cx="192000" cy="189000"/>
+            <a:off x="5272000" y="1512000"/>
+            <a:ext cx="200000" cy="225000"/>
           </a:xfrm>
           <a:prstGeom prst="rect">
             <a:avLst/>
@@ -24935,8 +24935,8 @@
         </p:nvSpPr>
         <p:spPr>
           <a:xfrm>
-            <a:off x="3707999" y="1449000"/>
-            <a:ext cx="192000" cy="189000"/>
+            <a:off x="3671999" y="1737000"/>
+            <a:ext cx="200000" cy="225000"/>
           </a:xfrm>
           <a:prstGeom prst="rect">
             <a:avLst/>
@@ -24981,8 +24981,8 @@
         </p:nvSpPr>
         <p:spPr>
           <a:xfrm>
-            <a:off x="3899999" y="1449000"/>
-            <a:ext cx="192000" cy="189000"/>
+            <a:off x="3871999" y="1737000"/>
+            <a:ext cx="200000" cy="225000"/>
           </a:xfrm>
           <a:prstGeom prst="rect">
             <a:avLst/>
@@ -25027,8 +25027,8 @@
         </p:nvSpPr>
         <p:spPr>
           <a:xfrm>
-            <a:off x="4091999" y="1449000"/>
-            <a:ext cx="192000" cy="189000"/>
+            <a:off x="4071999" y="1737000"/>
+            <a:ext cx="200000" cy="225000"/>
           </a:xfrm>
           <a:prstGeom prst="rect">
             <a:avLst/>
@@ -25073,8 +25073,8 @@
         </p:nvSpPr>
         <p:spPr>
           <a:xfrm>
-            <a:off x="4283999" y="1449000"/>
-            <a:ext cx="192000" cy="189000"/>
+            <a:off x="4271999" y="1737000"/>
+            <a:ext cx="200000" cy="225000"/>
           </a:xfrm>
           <a:prstGeom prst="rect">
             <a:avLst/>
@@ -25119,8 +25119,8 @@
         </p:nvSpPr>
         <p:spPr>
           <a:xfrm>
-            <a:off x="4475999" y="1449000"/>
-            <a:ext cx="192000" cy="189000"/>
+            <a:off x="4471999" y="1737000"/>
+            <a:ext cx="200000" cy="225000"/>
           </a:xfrm>
           <a:prstGeom prst="rect">
             <a:avLst/>
@@ -25165,8 +25165,8 @@
         </p:nvSpPr>
         <p:spPr>
           <a:xfrm>
-            <a:off x="4667999" y="1449000"/>
-            <a:ext cx="192000" cy="189000"/>
+            <a:off x="4672000" y="1737000"/>
+            <a:ext cx="200000" cy="225000"/>
           </a:xfrm>
           <a:prstGeom prst="rect">
             <a:avLst/>
@@ -25211,8 +25211,8 @@
         </p:nvSpPr>
         <p:spPr>
           <a:xfrm>
-            <a:off x="4860000" y="1449000"/>
-            <a:ext cx="192000" cy="189000"/>
+            <a:off x="4872000" y="1737000"/>
+            <a:ext cx="200000" cy="225000"/>
           </a:xfrm>
           <a:prstGeom prst="rect">
             <a:avLst/>
@@ -25257,8 +25257,8 @@
         </p:nvSpPr>
         <p:spPr>
           <a:xfrm>
-            <a:off x="5051999" y="1449000"/>
-            <a:ext cx="192000" cy="189000"/>
+            <a:off x="5072000" y="1737000"/>
+            <a:ext cx="200000" cy="225000"/>
           </a:xfrm>
           <a:prstGeom prst="rect">
             <a:avLst/>
@@ -25303,8 +25303,8 @@
         </p:nvSpPr>
         <p:spPr>
           <a:xfrm>
-            <a:off x="5244000" y="1449000"/>
-            <a:ext cx="192000" cy="189000"/>
+            <a:off x="5272000" y="1737000"/>
+            <a:ext cx="200000" cy="225000"/>
           </a:xfrm>
           <a:prstGeom prst="rect">
             <a:avLst/>
@@ -25349,8 +25349,8 @@
         </p:nvSpPr>
         <p:spPr>
           <a:xfrm>
-            <a:off x="5561999" y="797400"/>
-            <a:ext cx="1440000" cy="251999"/>
+            <a:off x="5598000" y="936000"/>
+            <a:ext cx="1800000" cy="251999"/>
           </a:xfrm>
           <a:prstGeom prst="rect">
             <a:avLst/>
@@ -25384,8 +25384,8 @@
         </p:nvCxnSpPr>
         <p:spPr>
           <a:xfrm>
-            <a:off x="4572000" y="1638000"/>
-            <a:ext cx="0" cy="270000"/>
+            <a:off x="4572000" y="1962000"/>
+            <a:ext cx="0" cy="306000"/>
           </a:xfrm>
           <a:prstGeom prst="line">
             <a:avLst/>
@@ -25419,7 +25419,7 @@
         </p:nvCxnSpPr>
         <p:spPr>
           <a:xfrm>
-            <a:off x="1350000" y="1908000"/>
+            <a:off x="1350000" y="2268000"/>
             <a:ext cx="6425999" cy="0"/>
           </a:xfrm>
           <a:prstGeom prst="line">
@@ -25454,7 +25454,7 @@
         </p:nvCxnSpPr>
         <p:spPr>
           <a:xfrm>
-            <a:off x="1350000" y="1908000"/>
+            <a:off x="1350000" y="2268000"/>
             <a:ext cx="0" cy="154800"/>
           </a:xfrm>
           <a:prstGeom prst="line">
@@ -25490,8 +25490,8 @@
         </p:nvSpPr>
         <p:spPr>
           <a:xfrm>
-            <a:off x="342000" y="2070000"/>
-            <a:ext cx="2015999" cy="2951999"/>
+            <a:off x="342000" y="2430000"/>
+            <a:ext cx="2015999" cy="2591999"/>
           </a:xfrm>
           <a:prstGeom prst="roundRect">
             <a:avLst>
@@ -25538,7 +25538,7 @@
         </p:nvSpPr>
         <p:spPr>
           <a:xfrm>
-            <a:off x="450000" y="2124000"/>
+            <a:off x="450000" y="2484000"/>
             <a:ext cx="1800000" cy="270000"/>
           </a:xfrm>
           <a:prstGeom prst="rect">
@@ -25581,7 +25581,7 @@
         </p:blipFill>
         <p:spPr>
           <a:xfrm>
-            <a:off x="450000" y="2430000"/>
+            <a:off x="450000" y="2790000"/>
             <a:ext cx="1800000" cy="1800000"/>
           </a:xfrm>
           <a:prstGeom prst="rect">
@@ -25597,7 +25597,7 @@
         </p:nvSpPr>
         <p:spPr>
           <a:xfrm>
-            <a:off x="413999" y="4302000"/>
+            <a:off x="413999" y="4662000"/>
             <a:ext cx="1871999" cy="251999"/>
           </a:xfrm>
           <a:prstGeom prst="rect">
@@ -25632,7 +25632,7 @@
         </p:nvCxnSpPr>
         <p:spPr>
           <a:xfrm>
-            <a:off x="3491999" y="1908000"/>
+            <a:off x="3491999" y="2268000"/>
             <a:ext cx="0" cy="154800"/>
           </a:xfrm>
           <a:prstGeom prst="line">
@@ -25668,8 +25668,8 @@
         </p:nvSpPr>
         <p:spPr>
           <a:xfrm>
-            <a:off x="2484000" y="2070000"/>
-            <a:ext cx="2015999" cy="2951999"/>
+            <a:off x="2484000" y="2430000"/>
+            <a:ext cx="2015999" cy="2591999"/>
           </a:xfrm>
           <a:prstGeom prst="roundRect">
             <a:avLst>
@@ -25716,7 +25716,7 @@
         </p:nvSpPr>
         <p:spPr>
           <a:xfrm>
-            <a:off x="2591999" y="2124000"/>
+            <a:off x="2591999" y="2484000"/>
             <a:ext cx="1800000" cy="270000"/>
           </a:xfrm>
           <a:prstGeom prst="rect">
@@ -25759,7 +25759,7 @@
         </p:blipFill>
         <p:spPr>
           <a:xfrm>
-            <a:off x="2591999" y="2430000"/>
+            <a:off x="2591999" y="2790000"/>
             <a:ext cx="1800000" cy="1800000"/>
           </a:xfrm>
           <a:prstGeom prst="rect">
@@ -25775,7 +25775,7 @@
         </p:nvSpPr>
         <p:spPr>
           <a:xfrm>
-            <a:off x="2556000" y="4302000"/>
+            <a:off x="2556000" y="4662000"/>
             <a:ext cx="1871999" cy="251999"/>
           </a:xfrm>
           <a:prstGeom prst="rect">
@@ -25810,7 +25810,7 @@
         </p:nvCxnSpPr>
         <p:spPr>
           <a:xfrm>
-            <a:off x="5633999" y="1908000"/>
+            <a:off x="5633999" y="2268000"/>
             <a:ext cx="0" cy="154800"/>
           </a:xfrm>
           <a:prstGeom prst="line">
@@ -25846,8 +25846,8 @@
         </p:nvSpPr>
         <p:spPr>
           <a:xfrm>
-            <a:off x="4625999" y="2070000"/>
-            <a:ext cx="2015999" cy="2951999"/>
+            <a:off x="4625999" y="2430000"/>
+            <a:ext cx="2015999" cy="2591999"/>
           </a:xfrm>
           <a:prstGeom prst="roundRect">
             <a:avLst>
@@ -25894,7 +25894,7 @@
         </p:nvSpPr>
         <p:spPr>
           <a:xfrm>
-            <a:off x="4733999" y="2124000"/>
+            <a:off x="4733999" y="2484000"/>
             <a:ext cx="1800000" cy="270000"/>
           </a:xfrm>
           <a:prstGeom prst="rect">
@@ -25937,7 +25937,7 @@
         </p:blipFill>
         <p:spPr>
           <a:xfrm>
-            <a:off x="4733999" y="2430000"/>
+            <a:off x="4733999" y="2790000"/>
             <a:ext cx="1800000" cy="1800000"/>
           </a:xfrm>
           <a:prstGeom prst="rect">
@@ -25953,7 +25953,7 @@
         </p:nvSpPr>
         <p:spPr>
           <a:xfrm>
-            <a:off x="4697999" y="4302000"/>
+            <a:off x="4697999" y="4662000"/>
             <a:ext cx="1871999" cy="251999"/>
           </a:xfrm>
           <a:prstGeom prst="rect">
@@ -25988,7 +25988,7 @@
         </p:nvCxnSpPr>
         <p:spPr>
           <a:xfrm>
-            <a:off x="7775999" y="1908000"/>
+            <a:off x="7775999" y="2268000"/>
             <a:ext cx="0" cy="154800"/>
           </a:xfrm>
           <a:prstGeom prst="line">
@@ -26024,8 +26024,8 @@
         </p:nvSpPr>
         <p:spPr>
           <a:xfrm>
-            <a:off x="6767999" y="2070000"/>
-            <a:ext cx="2015999" cy="2951999"/>
+            <a:off x="6767999" y="2430000"/>
+            <a:ext cx="2015999" cy="2591999"/>
           </a:xfrm>
           <a:prstGeom prst="roundRect">
             <a:avLst>
@@ -26072,7 +26072,7 @@
         </p:nvSpPr>
         <p:spPr>
           <a:xfrm>
-            <a:off x="6875999" y="2124000"/>
+            <a:off x="6875999" y="2484000"/>
             <a:ext cx="1800000" cy="270000"/>
           </a:xfrm>
           <a:prstGeom prst="rect">
@@ -26115,7 +26115,7 @@
         </p:blipFill>
         <p:spPr>
           <a:xfrm>
-            <a:off x="6875999" y="2430000"/>
+            <a:off x="6875999" y="2790000"/>
             <a:ext cx="1800000" cy="1800000"/>
           </a:xfrm>
           <a:prstGeom prst="rect">
@@ -26131,7 +26131,7 @@
         </p:nvSpPr>
         <p:spPr>
           <a:xfrm>
-            <a:off x="6839999" y="4302000"/>
+            <a:off x="6839999" y="4662000"/>
             <a:ext cx="1871999" cy="251999"/>
           </a:xfrm>
           <a:prstGeom prst="rect">
@@ -26166,8 +26166,8 @@
         </p:nvSpPr>
         <p:spPr>
           <a:xfrm>
-            <a:off x="288000" y="1925999"/>
-            <a:ext cx="2124000" cy="3167999"/>
+            <a:off x="288000" y="2286000"/>
+            <a:ext cx="2124000" cy="2808000"/>
           </a:xfrm>
           <a:prstGeom prst="rect">
             <a:avLst/>
@@ -26212,8 +26212,8 @@
         </p:nvSpPr>
         <p:spPr>
           <a:xfrm>
-            <a:off x="2429999" y="1925999"/>
-            <a:ext cx="2124000" cy="3167999"/>
+            <a:off x="2429999" y="2286000"/>
+            <a:ext cx="2124000" cy="2808000"/>
           </a:xfrm>
           <a:prstGeom prst="rect">
             <a:avLst/>
@@ -26258,8 +26258,8 @@
         </p:nvSpPr>
         <p:spPr>
           <a:xfrm>
-            <a:off x="4571999" y="1925999"/>
-            <a:ext cx="2124000" cy="3167999"/>
+            <a:off x="4571999" y="2286000"/>
+            <a:ext cx="2124000" cy="2808000"/>
           </a:xfrm>
           <a:prstGeom prst="rect">
             <a:avLst/>
